--- a/10-Knowledge-Products/KP1-GEA/videos/module_3/en/decks/KP1_M3_3.3_Deck_v0.2.pptx
+++ b/10-Knowledge-Products/KP1-GEA/videos/module_3/en/decks/KP1_M3_3.3_Deck_v0.2.pptx
@@ -14,15 +14,15 @@
     <p:handoutMasterId r:id="rId47"/>
   </p:handoutMasterIdLst>
   <p:sldIdLst>
-    <p:sldId id="2681" r:id="rId8"/>
-    <p:sldId id="2711" r:id="rId33"/>
-    <p:sldId id="2712" r:id="rId34"/>
     <p:sldId id="2713" r:id="rId35"/>
     <p:sldId id="2714" r:id="rId36"/>
     <p:sldId id="2715" r:id="rId37"/>
     <p:sldId id="2716" r:id="rId38"/>
     <p:sldId id="2717" r:id="rId39"/>
     <p:sldId id="2718" r:id="rId40"/>
+    <p:sldId id="2719" r:id="rId41"/>
+    <p:sldId id="2720" r:id="rId42"/>
+    <p:sldId id="2721" r:id="rId43"/>
   </p:sldIdLst>
   <p:sldSz cx="12192000" cy="6858000"/>
   <p:notesSz cx="6858000" cy="9144000"/>
@@ -934,146 +934,6 @@
           <a:lstStyle/>
           <a:p>
             <a:r>
-              <a:t>VO: Third, check each change. Not a heavy process — a light gate. When something is added, confirm it uses the shared entities correctly, that every data domain still has exactly one owner, and that any decision is logged with its reason. This keeps the repository conformant as it grows. The check is small. Skipping it lets the repository fill with private-language entries and orphaned items until it is as messy as the reality it was meant to clarify.</a:t>
-            </a:r>
-          </a:p>
-        </p:txBody>
-      </p:sp>
-      <p:sp>
-        <p:nvSpPr>
-          <p:cNvPr id="4" name="Slide Number Placeholder 3"/>
-          <p:cNvSpPr>
-            <a:spLocks noGrp="1"/>
-          </p:cNvSpPr>
-          <p:nvPr>
-            <p:ph type="sldNum" idx="5" sz="quarter"/>
-          </p:nvPr>
-        </p:nvSpPr>
-        <p:spPr/>
-      </p:sp>
-    </p:spTree>
-  </p:cSld>
-  <p:clrMapOvr>
-    <a:masterClrMapping/>
-  </p:clrMapOvr>
-</p:notes>
-</file>
-
-<file path=ppt/notesSlides/notesSlide18.xml><?xml version="1.0" encoding="utf-8"?>
-<p:notes xmlns:a="http://schemas.openxmlformats.org/drawingml/2006/main" xmlns:p="http://schemas.openxmlformats.org/presentationml/2006/main" xmlns:r="http://schemas.openxmlformats.org/officeDocument/2006/relationships">
-  <p:cSld>
-    <p:spTree>
-      <p:nvGrpSpPr>
-        <p:cNvPr id="1" name=""/>
-        <p:cNvGrpSpPr/>
-        <p:nvPr/>
-      </p:nvGrpSpPr>
-      <p:grpSpPr>
-        <a:xfrm>
-          <a:off x="0" y="0"/>
-          <a:ext cx="0" cy="0"/>
-          <a:chOff x="0" y="0"/>
-          <a:chExt cx="0" cy="0"/>
-        </a:xfrm>
-      </p:grpSpPr>
-      <p:sp>
-        <p:nvSpPr>
-          <p:cNvPr id="2" name="Slide Image Placeholder 1"/>
-          <p:cNvSpPr>
-            <a:spLocks noGrp="1"/>
-          </p:cNvSpPr>
-          <p:nvPr>
-            <p:ph type="sldImg" idx="2"/>
-          </p:nvPr>
-        </p:nvSpPr>
-        <p:spPr/>
-      </p:sp>
-      <p:sp>
-        <p:nvSpPr>
-          <p:cNvPr id="3" name="Notes Placeholder 2"/>
-          <p:cNvSpPr>
-            <a:spLocks noGrp="1"/>
-          </p:cNvSpPr>
-          <p:nvPr>
-            <p:ph type="body" idx="3" sz="quarter"/>
-          </p:nvPr>
-        </p:nvSpPr>
-        <p:spPr/>
-        <p:txBody>
-          <a:bodyPr/>
-          <a:lstStyle/>
-          <a:p>
-            <a:r>
-              <a:t>VO, slide 1: A repository has one enemy, and it is not technical. It is staleness. An architecture six months behind reality is worse than none — because people trust it, and it lies to them. Keeping it true is unglamorous and constant.</a:t>
-            </a:r>
-          </a:p>
-        </p:txBody>
-      </p:sp>
-      <p:sp>
-        <p:nvSpPr>
-          <p:cNvPr id="4" name="Slide Number Placeholder 3"/>
-          <p:cNvSpPr>
-            <a:spLocks noGrp="1"/>
-          </p:cNvSpPr>
-          <p:nvPr>
-            <p:ph type="sldNum" idx="5" sz="quarter"/>
-          </p:nvPr>
-        </p:nvSpPr>
-        <p:spPr/>
-      </p:sp>
-    </p:spTree>
-  </p:cSld>
-  <p:clrMapOvr>
-    <a:masterClrMapping/>
-  </p:clrMapOvr>
-</p:notes>
-</file>
-
-<file path=ppt/notesSlides/notesSlide19.xml><?xml version="1.0" encoding="utf-8"?>
-<p:notes xmlns:a="http://schemas.openxmlformats.org/drawingml/2006/main" xmlns:p="http://schemas.openxmlformats.org/presentationml/2006/main" xmlns:r="http://schemas.openxmlformats.org/officeDocument/2006/relationships">
-  <p:cSld>
-    <p:spTree>
-      <p:nvGrpSpPr>
-        <p:cNvPr id="1" name=""/>
-        <p:cNvGrpSpPr/>
-        <p:nvPr/>
-      </p:nvGrpSpPr>
-      <p:grpSpPr>
-        <a:xfrm>
-          <a:off x="0" y="0"/>
-          <a:ext cx="0" cy="0"/>
-          <a:chOff x="0" y="0"/>
-          <a:chExt cx="0" cy="0"/>
-        </a:xfrm>
-      </p:grpSpPr>
-      <p:sp>
-        <p:nvSpPr>
-          <p:cNvPr id="2" name="Slide Image Placeholder 1"/>
-          <p:cNvSpPr>
-            <a:spLocks noGrp="1"/>
-          </p:cNvSpPr>
-          <p:nvPr>
-            <p:ph type="sldImg" idx="2"/>
-          </p:nvPr>
-        </p:nvSpPr>
-        <p:spPr/>
-      </p:sp>
-      <p:sp>
-        <p:nvSpPr>
-          <p:cNvPr id="3" name="Notes Placeholder 2"/>
-          <p:cNvSpPr>
-            <a:spLocks noGrp="1"/>
-          </p:cNvSpPr>
-          <p:nvPr>
-            <p:ph type="body" idx="3" sz="quarter"/>
-          </p:nvPr>
-        </p:nvSpPr>
-        <p:spPr/>
-        <p:txBody>
-          <a:bodyPr/>
-          <a:lstStyle/>
-          <a:p>
-            <a:r>
               <a:t>VO: Start from why this matters. A missing architecture makes people ask questions. A wrong architecture answers them — wrongly. If the repository says the Examination Authority consumes the Learner Registry, and in reality it quietly built its own copy last quarter, then every decision made on the repository is built on a falsehood. Stale is worse than absent. Currency is not a nice-to-have. It is the whole value.</a:t>
             </a:r>
           </a:p>
@@ -1144,7 +1004,7 @@
           <a:lstStyle/>
           <a:p>
             <a:r>
-              <a:t>VO: Second, define what triggers an update. Not review it every year — that guarantees it is eleven months stale. Tie updates to events. A new system goes live: update the application layer. A system is retired: remove it. A new data domain appears: add it with its owner. The Board makes a decision: record it. A ministry reorganises: revise the capabilities. When a real-world change happens, the repository changes with it. Events drive updates, not the calendar.</a:t>
+              <a:t>VO: A repository has one enemy, and it is not technical. It is staleness. An architecture six months behind reality is worse than none — because people trust it, and it lies to them. Keeping it true is unglamorous and constant.</a:t>
             </a:r>
           </a:p>
         </p:txBody>
@@ -1214,77 +1074,7 @@
           <a:lstStyle/>
           <a:p>
             <a:r>
-              <a:t>VO: First, name one owner. One person — usually the chief architect or a named custodian on the EA team — is accountable for the repository being current. Not a committee. Not everyone. When everyone owns currency, no one does. One name, one accountability. That person does not do all the updating, but they are answerable for whether the picture is true.</a:t>
-            </a:r>
-          </a:p>
-        </p:txBody>
-      </p:sp>
-      <p:sp>
-        <p:nvSpPr>
-          <p:cNvPr id="4" name="Slide Number Placeholder 3"/>
-          <p:cNvSpPr>
-            <a:spLocks noGrp="1"/>
-          </p:cNvSpPr>
-          <p:nvPr>
-            <p:ph type="sldNum" idx="5" sz="quarter"/>
-          </p:nvPr>
-        </p:nvSpPr>
-        <p:spPr/>
-      </p:sp>
-    </p:spTree>
-  </p:cSld>
-  <p:clrMapOvr>
-    <a:masterClrMapping/>
-  </p:clrMapOvr>
-</p:notes>
-</file>
-
-<file path=ppt/notesSlides/notesSlide21.xml><?xml version="1.0" encoding="utf-8"?>
-<p:notes xmlns:a="http://schemas.openxmlformats.org/drawingml/2006/main" xmlns:p="http://schemas.openxmlformats.org/presentationml/2006/main" xmlns:r="http://schemas.openxmlformats.org/officeDocument/2006/relationships">
-  <p:cSld>
-    <p:spTree>
-      <p:nvGrpSpPr>
-        <p:cNvPr id="1" name=""/>
-        <p:cNvGrpSpPr/>
-        <p:nvPr/>
-      </p:nvGrpSpPr>
-      <p:grpSpPr>
-        <a:xfrm>
-          <a:off x="0" y="0"/>
-          <a:ext cx="0" cy="0"/>
-          <a:chOff x="0" y="0"/>
-          <a:chExt cx="0" cy="0"/>
-        </a:xfrm>
-      </p:grpSpPr>
-      <p:sp>
-        <p:nvSpPr>
-          <p:cNvPr id="2" name="Slide Image Placeholder 1"/>
-          <p:cNvSpPr>
-            <a:spLocks noGrp="1"/>
-          </p:cNvSpPr>
-          <p:nvPr>
-            <p:ph type="sldImg" idx="2"/>
-          </p:nvPr>
-        </p:nvSpPr>
-        <p:spPr/>
-      </p:sp>
-      <p:sp>
-        <p:nvSpPr>
-          <p:cNvPr id="3" name="Notes Placeholder 2"/>
-          <p:cNvSpPr>
-            <a:spLocks noGrp="1"/>
-          </p:cNvSpPr>
-          <p:nvPr>
-            <p:ph type="body" idx="3" sz="quarter"/>
-          </p:nvPr>
-        </p:nvSpPr>
-        <p:spPr/>
-        <p:txBody>
-          <a:bodyPr/>
-          <a:lstStyle/>
-          <a:p>
-            <a:r>
-              <a:t>Title card for standalone video 3.3. Content slides are identical to the corresponding section of the combined deck KP1_M3_Deck_v0.2.pptx; voice-over is in each slide’s notes.</a:t>
+              <a:t>Title card — the cold open. The hosts name the module, the video number, the title and the single message on this slide; no scripted narration. Hold until the opener begins; the opener is narrated on the next slide.</a:t>
             </a:r>
           </a:p>
         </p:txBody>
@@ -1354,7 +1144,7 @@
           <a:lstStyle/>
           <a:p>
             <a:r>
-              <a:t>VO: The cheapest moment to update the repository is when a project comes to the Board for review. The project tells you what it will build, what it will consume, what data it touches. That is exactly the information the repository needs. So tie the two together: a project that passes the gate leaves its architecture change in the repository as it goes. The governance process and the update discipline are the same motion, done once.</a:t>
+              <a:t>VO: First, name one owner. One person — usually the chief architect or a named custodian on the EA team — is accountable for the repository being current. Not a committee. Not everyone. When everyone owns currency, no one does. One name, one accountability. That person does not do all the updating, but they are answerable for whether the picture is true.</a:t>
             </a:r>
           </a:p>
         </p:txBody>
@@ -1424,13 +1214,7 @@
           <a:lstStyle/>
           <a:p>
             <a:r>
-              <a:t>PRACTICE BOX (on-screen only — never read it, never paraphrase it, never point at it). It replaces the narrated handoff: this video ends on the recap and the Sources slide.</a:t>
-            </a:r>
-          </a:p>
-          <a:p/>
-          <a:p>
-            <a:r>
-              <a:t>VO: Keep the repository true. One named owner. Updates triggered by events, not a yearly review. A light conformance check. Neglect it, and within a year you have a widely-trusted work of fiction.</a:t>
+              <a:t>VO: Second, define what triggers an update. Not review it every year — that guarantees it is eleven months stale. Tie updates to events. A new system goes live: update the application layer. A system is retired: remove it. A new data domain appears: add it with its owner. The Board makes a decision: record it. A ministry reorganises: revise the capabilities. When a real-world change happens, the repository changes with it. Events drive updates, not the calendar.</a:t>
             </a:r>
           </a:p>
         </p:txBody>
@@ -1456,6 +1240,222 @@
 </file>
 
 <file path=ppt/notesSlides/notesSlide25.xml><?xml version="1.0" encoding="utf-8"?>
+<p:notes xmlns:a="http://schemas.openxmlformats.org/drawingml/2006/main" xmlns:p="http://schemas.openxmlformats.org/presentationml/2006/main" xmlns:r="http://schemas.openxmlformats.org/officeDocument/2006/relationships">
+  <p:cSld>
+    <p:spTree>
+      <p:nvGrpSpPr>
+        <p:cNvPr id="1" name=""/>
+        <p:cNvGrpSpPr/>
+        <p:nvPr/>
+      </p:nvGrpSpPr>
+      <p:grpSpPr>
+        <a:xfrm>
+          <a:off x="0" y="0"/>
+          <a:ext cx="0" cy="0"/>
+          <a:chOff x="0" y="0"/>
+          <a:chExt cx="0" cy="0"/>
+        </a:xfrm>
+      </p:grpSpPr>
+      <p:sp>
+        <p:nvSpPr>
+          <p:cNvPr id="2" name="Slide Image Placeholder 1"/>
+          <p:cNvSpPr>
+            <a:spLocks noGrp="1"/>
+          </p:cNvSpPr>
+          <p:nvPr>
+            <p:ph type="sldImg" idx="2"/>
+          </p:nvPr>
+        </p:nvSpPr>
+        <p:spPr/>
+      </p:sp>
+      <p:sp>
+        <p:nvSpPr>
+          <p:cNvPr id="3" name="Notes Placeholder 2"/>
+          <p:cNvSpPr>
+            <a:spLocks noGrp="1"/>
+          </p:cNvSpPr>
+          <p:nvPr>
+            <p:ph type="body" idx="3" sz="quarter"/>
+          </p:nvPr>
+        </p:nvSpPr>
+        <p:spPr/>
+        <p:txBody>
+          <a:bodyPr/>
+          <a:lstStyle/>
+          <a:p>
+            <a:r>
+              <a:t>VO: Third, check each change. Not a heavy process — a light gate. When something is added, confirm it uses the shared entities correctly, that every data domain still has exactly one owner, and that any decision is logged with its reason. This keeps the repository conformant as it grows. The check is small. Skipping it lets the repository fill with private-language entries and orphaned items until it is as messy as the reality it was meant to clarify.</a:t>
+            </a:r>
+          </a:p>
+        </p:txBody>
+      </p:sp>
+      <p:sp>
+        <p:nvSpPr>
+          <p:cNvPr id="4" name="Slide Number Placeholder 3"/>
+          <p:cNvSpPr>
+            <a:spLocks noGrp="1"/>
+          </p:cNvSpPr>
+          <p:nvPr>
+            <p:ph type="sldNum" idx="5" sz="quarter"/>
+          </p:nvPr>
+        </p:nvSpPr>
+        <p:spPr/>
+      </p:sp>
+    </p:spTree>
+  </p:cSld>
+  <p:clrMapOvr>
+    <a:masterClrMapping/>
+  </p:clrMapOvr>
+</p:notes>
+</file>
+
+<file path=ppt/notesSlides/notesSlide26.xml><?xml version="1.0" encoding="utf-8"?>
+<p:notes xmlns:a="http://schemas.openxmlformats.org/drawingml/2006/main" xmlns:p="http://schemas.openxmlformats.org/presentationml/2006/main" xmlns:r="http://schemas.openxmlformats.org/officeDocument/2006/relationships">
+  <p:cSld>
+    <p:spTree>
+      <p:nvGrpSpPr>
+        <p:cNvPr id="1" name=""/>
+        <p:cNvGrpSpPr/>
+        <p:nvPr/>
+      </p:nvGrpSpPr>
+      <p:grpSpPr>
+        <a:xfrm>
+          <a:off x="0" y="0"/>
+          <a:ext cx="0" cy="0"/>
+          <a:chOff x="0" y="0"/>
+          <a:chExt cx="0" cy="0"/>
+        </a:xfrm>
+      </p:grpSpPr>
+      <p:sp>
+        <p:nvSpPr>
+          <p:cNvPr id="2" name="Slide Image Placeholder 1"/>
+          <p:cNvSpPr>
+            <a:spLocks noGrp="1"/>
+          </p:cNvSpPr>
+          <p:nvPr>
+            <p:ph type="sldImg" idx="2"/>
+          </p:nvPr>
+        </p:nvSpPr>
+        <p:spPr/>
+      </p:sp>
+      <p:sp>
+        <p:nvSpPr>
+          <p:cNvPr id="3" name="Notes Placeholder 2"/>
+          <p:cNvSpPr>
+            <a:spLocks noGrp="1"/>
+          </p:cNvSpPr>
+          <p:nvPr>
+            <p:ph type="body" idx="3" sz="quarter"/>
+          </p:nvPr>
+        </p:nvSpPr>
+        <p:spPr/>
+        <p:txBody>
+          <a:bodyPr/>
+          <a:lstStyle/>
+          <a:p>
+            <a:r>
+              <a:t>VO: The cheapest moment to update the repository is when a project comes to the Board for review. The project tells you what it will build, what it will consume, what data it touches. That is exactly the information the repository needs. So tie the two together: a project that passes the gate leaves its architecture change in the repository as it goes. The governance process and the update discipline are the same motion, done once.</a:t>
+            </a:r>
+          </a:p>
+        </p:txBody>
+      </p:sp>
+      <p:sp>
+        <p:nvSpPr>
+          <p:cNvPr id="4" name="Slide Number Placeholder 3"/>
+          <p:cNvSpPr>
+            <a:spLocks noGrp="1"/>
+          </p:cNvSpPr>
+          <p:nvPr>
+            <p:ph type="sldNum" idx="5" sz="quarter"/>
+          </p:nvPr>
+        </p:nvSpPr>
+        <p:spPr/>
+      </p:sp>
+    </p:spTree>
+  </p:cSld>
+  <p:clrMapOvr>
+    <a:masterClrMapping/>
+  </p:clrMapOvr>
+</p:notes>
+</file>
+
+<file path=ppt/notesSlides/notesSlide27.xml><?xml version="1.0" encoding="utf-8"?>
+<p:notes xmlns:a="http://schemas.openxmlformats.org/drawingml/2006/main" xmlns:p="http://schemas.openxmlformats.org/presentationml/2006/main" xmlns:r="http://schemas.openxmlformats.org/officeDocument/2006/relationships">
+  <p:cSld>
+    <p:spTree>
+      <p:nvGrpSpPr>
+        <p:cNvPr id="1" name=""/>
+        <p:cNvGrpSpPr/>
+        <p:nvPr/>
+      </p:nvGrpSpPr>
+      <p:grpSpPr>
+        <a:xfrm>
+          <a:off x="0" y="0"/>
+          <a:ext cx="0" cy="0"/>
+          <a:chOff x="0" y="0"/>
+          <a:chExt cx="0" cy="0"/>
+        </a:xfrm>
+      </p:grpSpPr>
+      <p:sp>
+        <p:nvSpPr>
+          <p:cNvPr id="2" name="Slide Image Placeholder 1"/>
+          <p:cNvSpPr>
+            <a:spLocks noGrp="1"/>
+          </p:cNvSpPr>
+          <p:nvPr>
+            <p:ph type="sldImg" idx="2"/>
+          </p:nvPr>
+        </p:nvSpPr>
+        <p:spPr/>
+      </p:sp>
+      <p:sp>
+        <p:nvSpPr>
+          <p:cNvPr id="3" name="Notes Placeholder 2"/>
+          <p:cNvSpPr>
+            <a:spLocks noGrp="1"/>
+          </p:cNvSpPr>
+          <p:nvPr>
+            <p:ph type="body" idx="3" sz="quarter"/>
+          </p:nvPr>
+        </p:nvSpPr>
+        <p:spPr/>
+        <p:txBody>
+          <a:bodyPr/>
+          <a:lstStyle/>
+          <a:p>
+            <a:r>
+              <a:t>PRACTICE BOX (on-screen only — never read it, never paraphrase it, never point at it). It replaces the narrated handoff: this video ends on the recap and the Sources slide.</a:t>
+            </a:r>
+          </a:p>
+          <a:p/>
+          <a:p>
+            <a:r>
+              <a:t>VO: Keep the repository true. One named owner. Updates triggered by events, not a yearly review. A light conformance check. Neglect it, and within a year you have a widely-trusted work of fiction.</a:t>
+            </a:r>
+          </a:p>
+        </p:txBody>
+      </p:sp>
+      <p:sp>
+        <p:nvSpPr>
+          <p:cNvPr id="4" name="Slide Number Placeholder 3"/>
+          <p:cNvSpPr>
+            <a:spLocks noGrp="1"/>
+          </p:cNvSpPr>
+          <p:nvPr>
+            <p:ph type="sldNum" idx="5" sz="quarter"/>
+          </p:nvPr>
+        </p:nvSpPr>
+        <p:spPr/>
+      </p:sp>
+    </p:spTree>
+  </p:cSld>
+  <p:clrMapOvr>
+    <a:masterClrMapping/>
+  </p:clrMapOvr>
+</p:notes>
+</file>
+
+<file path=ppt/notesSlides/notesSlide28.xml><?xml version="1.0" encoding="utf-8"?>
 <p:notes xmlns:a="http://schemas.openxmlformats.org/drawingml/2006/main" xmlns:p="http://schemas.openxmlformats.org/presentationml/2006/main" xmlns:r="http://schemas.openxmlformats.org/officeDocument/2006/relationships">
   <p:cSld>
     <p:spTree>
@@ -11661,1105 +11661,6 @@
 </p:sldMaster>
 </file>
 
-<file path=ppt/slides/slide1.xml><?xml version="1.0" encoding="utf-8"?>
-<p:sld xmlns:a="http://schemas.openxmlformats.org/drawingml/2006/main" xmlns:r="http://schemas.openxmlformats.org/officeDocument/2006/relationships" xmlns:p="http://schemas.openxmlformats.org/presentationml/2006/main">
-  <p:cSld>
-    <p:spTree>
-      <p:nvGrpSpPr>
-        <p:cNvPr id="1" name=""/>
-        <p:cNvGrpSpPr/>
-        <p:nvPr/>
-      </p:nvGrpSpPr>
-      <p:grpSpPr>
-        <a:xfrm>
-          <a:off x="0" y="0"/>
-          <a:ext cx="0" cy="0"/>
-          <a:chOff x="0" y="0"/>
-          <a:chExt cx="0" cy="0"/>
-        </a:xfrm>
-      </p:grpSpPr>
-      <p:cxnSp>
-        <p:nvCxnSpPr>
-          <p:cNvPr id="11" name="Straight Connector 10">
-            <a:extLst>
-              <a:ext uri="{FF2B5EF4-FFF2-40B4-BE49-F238E27FC236}">
-                <a16:creationId xmlns:a16="http://schemas.microsoft.com/office/drawing/2014/main" id="{D9AD66F2-F7C0-4D03-9150-D28F17AC561D}"/>
-              </a:ext>
-            </a:extLst>
-          </p:cNvPr>
-          <p:cNvCxnSpPr>
-            <a:cxnSpLocks/>
-          </p:cNvCxnSpPr>
-          <p:nvPr/>
-        </p:nvCxnSpPr>
-        <p:spPr>
-          <a:xfrm>
-            <a:off x="373021" y="2198718"/>
-            <a:ext cx="6843567" cy="0"/>
-          </a:xfrm>
-          <a:prstGeom prst="line">
-            <a:avLst/>
-          </a:prstGeom>
-          <a:ln w="12700">
-            <a:solidFill>
-              <a:srgbClr val="009CD6"/>
-            </a:solidFill>
-          </a:ln>
-        </p:spPr>
-        <p:style>
-          <a:lnRef idx="1">
-            <a:schemeClr val="accent1"/>
-          </a:lnRef>
-          <a:fillRef idx="0">
-            <a:schemeClr val="accent1"/>
-          </a:fillRef>
-          <a:effectRef idx="0">
-            <a:schemeClr val="accent1"/>
-          </a:effectRef>
-          <a:fontRef idx="minor">
-            <a:schemeClr val="tx1"/>
-          </a:fontRef>
-        </p:style>
-      </p:cxnSp>
-      <p:sp>
-        <p:nvSpPr>
-          <p:cNvPr id="12" name="Title 9">
-            <a:extLst>
-              <a:ext uri="{FF2B5EF4-FFF2-40B4-BE49-F238E27FC236}">
-                <a16:creationId xmlns:a16="http://schemas.microsoft.com/office/drawing/2014/main" id="{EEB08032-CE0E-4986-AEDF-A41026C0E8B9}"/>
-              </a:ext>
-            </a:extLst>
-          </p:cNvPr>
-          <p:cNvSpPr txBox="1">
-            <a:spLocks/>
-          </p:cNvSpPr>
-          <p:nvPr/>
-        </p:nvSpPr>
-        <p:spPr>
-          <a:xfrm>
-            <a:off x="237734" y="702833"/>
-            <a:ext cx="6432007" cy="1218817"/>
-          </a:xfrm>
-          <a:prstGeom prst="rect">
-            <a:avLst/>
-          </a:prstGeom>
-        </p:spPr>
-        <p:txBody>
-          <a:bodyPr anchor="b">
-            <a:noAutofit/>
-          </a:bodyPr>
-          <a:lstStyle>
-            <a:lvl1pPr algn="l" defTabSz="914400" rtl="0" eaLnBrk="1" latinLnBrk="0" hangingPunct="1">
-              <a:lnSpc>
-                <a:spcPct val="90000"/>
-              </a:lnSpc>
-              <a:spcBef>
-                <a:spcPct val="0"/>
-              </a:spcBef>
-              <a:buNone/>
-              <a:defRPr sz="4000" kern="1200">
-                <a:solidFill>
-                  <a:schemeClr val="bg1"/>
-                </a:solidFill>
-                <a:latin typeface="Arial" panose="020B0604020202020204" pitchFamily="34" charset="0"/>
-                <a:ea typeface="+mj-ea"/>
-                <a:cs typeface="Arial" panose="020B0604020202020204" pitchFamily="34" charset="0"/>
-              </a:defRPr>
-            </a:lvl1pPr>
-          </a:lstStyle>
-          <a:p>
-            <a:r>
-              <a:rPr sz="2400" b="1" i="0">
-                <a:solidFill>
-                  <a:srgbClr val="1A1A1A"/>
-                </a:solidFill>
-                <a:latin typeface="Arial"/>
-              </a:rPr>
-              <a:t>3.3 — Keep the repository true — the update discipline</a:t>
-            </a:r>
-          </a:p>
-        </p:txBody>
-      </p:sp>
-      <p:pic>
-        <p:nvPicPr>
-          <p:cNvPr id="7" name="Picture 6">
-            <a:extLst>
-              <a:ext uri="{FF2B5EF4-FFF2-40B4-BE49-F238E27FC236}">
-                <a16:creationId xmlns:a16="http://schemas.microsoft.com/office/drawing/2014/main" id="{A2066351-C569-4C4C-A096-308777FCDC32}"/>
-              </a:ext>
-            </a:extLst>
-          </p:cNvPr>
-          <p:cNvPicPr>
-            <a:picLocks noChangeAspect="1"/>
-          </p:cNvPicPr>
-          <p:nvPr/>
-        </p:nvPicPr>
-        <p:blipFill>
-          <a:blip r:embed="rId2">
-            <a:extLst>
-              <a:ext uri="{28A0092B-C50C-407E-A947-70E740481C1C}">
-                <a14:useLocalDpi xmlns:a14="http://schemas.microsoft.com/office/drawing/2010/main" val="0"/>
-              </a:ext>
-            </a:extLst>
-          </a:blip>
-          <a:srcRect t="20219" b="14729"/>
-          <a:stretch>
-            <a:fillRect/>
-          </a:stretch>
-        </p:blipFill>
-        <p:spPr>
-          <a:xfrm>
-            <a:off x="0" y="5620871"/>
-            <a:ext cx="1323975" cy="1218816"/>
-          </a:xfrm>
-          <a:prstGeom prst="rect">
-            <a:avLst/>
-          </a:prstGeom>
-        </p:spPr>
-      </p:pic>
-      <p:sp>
-        <p:nvSpPr>
-          <p:cNvPr id="14" name="Title 9">
-            <a:extLst>
-              <a:ext uri="{FF2B5EF4-FFF2-40B4-BE49-F238E27FC236}">
-                <a16:creationId xmlns:a16="http://schemas.microsoft.com/office/drawing/2014/main" id="{B5087B80-3EE4-1881-0130-ED58CA625092}"/>
-              </a:ext>
-            </a:extLst>
-          </p:cNvPr>
-          <p:cNvSpPr txBox="1">
-            <a:spLocks/>
-          </p:cNvSpPr>
-          <p:nvPr/>
-        </p:nvSpPr>
-        <p:spPr>
-          <a:xfrm>
-            <a:off x="284452" y="2475786"/>
-            <a:ext cx="6382893" cy="953213"/>
-          </a:xfrm>
-          <a:prstGeom prst="rect">
-            <a:avLst/>
-          </a:prstGeom>
-        </p:spPr>
-        <p:txBody>
-          <a:bodyPr anchor="t">
-            <a:noAutofit/>
-          </a:bodyPr>
-          <a:lstStyle>
-            <a:lvl1pPr algn="l" defTabSz="914400" rtl="0" eaLnBrk="1" latinLnBrk="0" hangingPunct="1">
-              <a:lnSpc>
-                <a:spcPct val="90000"/>
-              </a:lnSpc>
-              <a:spcBef>
-                <a:spcPct val="0"/>
-              </a:spcBef>
-              <a:buNone/>
-              <a:defRPr sz="4000" kern="1200">
-                <a:solidFill>
-                  <a:schemeClr val="bg1"/>
-                </a:solidFill>
-                <a:latin typeface="Arial" panose="020B0604020202020204" pitchFamily="34" charset="0"/>
-                <a:ea typeface="+mj-ea"/>
-                <a:cs typeface="Arial" panose="020B0604020202020204" pitchFamily="34" charset="0"/>
-              </a:defRPr>
-            </a:lvl1pPr>
-          </a:lstStyle>
-          <a:p>
-            <a:pPr marL="0" marR="0" lvl="0" indent="0" rtl="0">
-              <a:spcBef>
-                <a:spcPts val="600"/>
-              </a:spcBef>
-              <a:spcAft>
-                <a:spcPts val="0"/>
-              </a:spcAft>
-              <a:buNone/>
-            </a:pPr>
-            <a:r>
-              <a:rPr sz="1300" b="1" i="0">
-                <a:solidFill>
-                  <a:srgbClr val="006E96"/>
-                </a:solidFill>
-                <a:latin typeface="Arial"/>
-              </a:rPr>
-              <a:t>KP1 · Government Enterprise Architecture · Module 3 · Video 3.3</a:t>
-            </a:r>
-          </a:p>
-          <a:p>
-            <a:r>
-              <a:rPr sz="1200" b="0" i="1">
-                <a:solidFill>
-                  <a:srgbClr val="595959"/>
-                </a:solidFill>
-                <a:latin typeface="Arial"/>
-              </a:rPr>
-              <a:t>A repository is only worth what it is current. Decide who owns it, what event triggers an update, and how a change is checked — so the architecture tracks reality instead of slowly becoming a confident work of fiction.</a:t>
-            </a:r>
-          </a:p>
-        </p:txBody>
-      </p:sp>
-      <p:sp>
-        <p:nvSpPr>
-          <p:cNvPr id="17" name="Title 9">
-            <a:extLst>
-              <a:ext uri="{FF2B5EF4-FFF2-40B4-BE49-F238E27FC236}">
-                <a16:creationId xmlns:a16="http://schemas.microsoft.com/office/drawing/2014/main" id="{5E8796F7-DD26-D250-5E97-B38B22298E72}"/>
-              </a:ext>
-            </a:extLst>
-          </p:cNvPr>
-          <p:cNvSpPr txBox="1">
-            <a:spLocks/>
-          </p:cNvSpPr>
-          <p:nvPr/>
-        </p:nvSpPr>
-        <p:spPr>
-          <a:xfrm>
-            <a:off x="284452" y="4363897"/>
-            <a:ext cx="6382893" cy="953213"/>
-          </a:xfrm>
-          <a:prstGeom prst="rect">
-            <a:avLst/>
-          </a:prstGeom>
-        </p:spPr>
-        <p:txBody>
-          <a:bodyPr anchor="t">
-            <a:noAutofit/>
-          </a:bodyPr>
-          <a:lstStyle>
-            <a:lvl1pPr algn="l" defTabSz="914400" rtl="0" eaLnBrk="1" latinLnBrk="0" hangingPunct="1">
-              <a:lnSpc>
-                <a:spcPct val="90000"/>
-              </a:lnSpc>
-              <a:spcBef>
-                <a:spcPct val="0"/>
-              </a:spcBef>
-              <a:buNone/>
-              <a:defRPr sz="4000" kern="1200">
-                <a:solidFill>
-                  <a:schemeClr val="bg1"/>
-                </a:solidFill>
-                <a:latin typeface="Arial" panose="020B0604020202020204" pitchFamily="34" charset="0"/>
-                <a:ea typeface="+mj-ea"/>
-                <a:cs typeface="Arial" panose="020B0604020202020204" pitchFamily="34" charset="0"/>
-              </a:defRPr>
-            </a:lvl1pPr>
-          </a:lstStyle>
-          <a:p>
-            <a:pPr marL="0" marR="0" lvl="0" indent="0" rtl="0">
-              <a:spcBef>
-                <a:spcPts val="600"/>
-              </a:spcBef>
-              <a:spcAft>
-                <a:spcPts val="1200"/>
-              </a:spcAft>
-              <a:buNone/>
-            </a:pPr>
-            <a:r>
-              <a:rPr sz="1400" b="1" i="0">
-                <a:solidFill>
-                  <a:srgbClr val="1A1A1A"/>
-                </a:solidFill>
-                <a:latin typeface="Arial"/>
-              </a:rPr>
-              <a:t>Target audience: </a:t>
-            </a:r>
-            <a:r>
-              <a:rPr sz="1400" b="0" i="0">
-                <a:solidFill>
-                  <a:srgbClr val="1A1A1A"/>
-                </a:solidFill>
-                <a:latin typeface="Arial"/>
-              </a:rPr>
-              <a:t>Chief architect · senior architect · sector ICT lead</a:t>
-            </a:r>
-          </a:p>
-        </p:txBody>
-      </p:sp>
-      <p:sp>
-        <p:nvSpPr>
-          <p:cNvPr id="18" name="Rectangle 17"/>
-          <p:cNvSpPr/>
-          <p:nvPr/>
-        </p:nvSpPr>
-        <p:spPr>
-          <a:xfrm>
-            <a:off x="7022592" y="0"/>
-            <a:ext cx="5169103" cy="6858000"/>
-          </a:xfrm>
-          <a:prstGeom prst="rect">
-            <a:avLst/>
-          </a:prstGeom>
-          <a:solidFill>
-            <a:srgbClr val="009CD6"/>
-          </a:solidFill>
-          <a:ln>
-            <a:noFill/>
-          </a:ln>
-          <a:effectLst/>
-        </p:spPr>
-        <p:style>
-          <a:lnRef idx="1">
-            <a:schemeClr val="accent1"/>
-          </a:lnRef>
-          <a:fillRef idx="3">
-            <a:schemeClr val="accent1"/>
-          </a:fillRef>
-          <a:effectRef idx="2">
-            <a:schemeClr val="accent1"/>
-          </a:effectRef>
-          <a:fontRef idx="minor">
-            <a:schemeClr val="lt1"/>
-          </a:fontRef>
-        </p:style>
-        <p:txBody>
-          <a:bodyPr rtlCol="0" anchor="ctr"/>
-          <a:lstStyle/>
-          <a:p>
-            <a:pPr algn="ctr"/>
-          </a:p>
-        </p:txBody>
-      </p:sp>
-      <p:sp>
-        <p:nvSpPr>
-          <p:cNvPr id="19" name="TextBox 18"/>
-          <p:cNvSpPr txBox="1"/>
-          <p:nvPr/>
-        </p:nvSpPr>
-        <p:spPr>
-          <a:xfrm>
-            <a:off x="7452360" y="457200"/>
-            <a:ext cx="4297680" cy="457200"/>
-          </a:xfrm>
-          <a:prstGeom prst="rect">
-            <a:avLst/>
-          </a:prstGeom>
-          <a:noFill/>
-        </p:spPr>
-        <p:txBody>
-          <a:bodyPr wrap="square">
-            <a:spAutoFit/>
-          </a:bodyPr>
-          <a:lstStyle/>
-          <a:p>
-            <a:r>
-              <a:rPr sz="1100" b="1" i="0">
-                <a:solidFill>
-                  <a:srgbClr val="E5F5FB"/>
-                </a:solidFill>
-                <a:latin typeface="Arial"/>
-              </a:rPr>
-              <a:t>THE PRACTICE THIS MODULE STANDS UP</a:t>
-            </a:r>
-          </a:p>
-        </p:txBody>
-      </p:sp>
-      <p:sp>
-        <p:nvSpPr>
-          <p:cNvPr id="20" name="Rounded Rectangle 19"/>
-          <p:cNvSpPr/>
-          <p:nvPr/>
-        </p:nvSpPr>
-        <p:spPr>
-          <a:xfrm>
-            <a:off x="7452360" y="960120"/>
-            <a:ext cx="3840480" cy="658368"/>
-          </a:xfrm>
-          <a:prstGeom prst="roundRect">
-            <a:avLst>
-              <a:gd name="adj" fmla="val 14000"/>
-            </a:avLst>
-          </a:prstGeom>
-          <a:solidFill>
-            <a:srgbClr val="FFFFFF"/>
-          </a:solidFill>
-          <a:ln>
-            <a:noFill/>
-          </a:ln>
-          <a:effectLst/>
-        </p:spPr>
-        <p:style>
-          <a:lnRef idx="1">
-            <a:schemeClr val="accent1"/>
-          </a:lnRef>
-          <a:fillRef idx="3">
-            <a:schemeClr val="accent1"/>
-          </a:fillRef>
-          <a:effectRef idx="2">
-            <a:schemeClr val="accent1"/>
-          </a:effectRef>
-          <a:fontRef idx="minor">
-            <a:schemeClr val="lt1"/>
-          </a:fontRef>
-        </p:style>
-        <p:txBody>
-          <a:bodyPr rtlCol="0" anchor="ctr" lIns="164592" wrap="square"/>
-          <a:lstStyle/>
-          <a:p>
-            <a:pPr algn="ctr"/>
-            <a:r>
-              <a:rPr sz="1500" b="1" i="0">
-                <a:solidFill>
-                  <a:srgbClr val="1A1A1A"/>
-                </a:solidFill>
-                <a:latin typeface="Arial"/>
-              </a:rPr>
-              <a:t>Repository — where the architecture lives</a:t>
-            </a:r>
-          </a:p>
-        </p:txBody>
-      </p:sp>
-      <p:sp>
-        <p:nvSpPr>
-          <p:cNvPr id="21" name="Rounded Rectangle 20"/>
-          <p:cNvSpPr/>
-          <p:nvPr/>
-        </p:nvSpPr>
-        <p:spPr>
-          <a:xfrm>
-            <a:off x="7452360" y="1892808"/>
-            <a:ext cx="3840480" cy="658368"/>
-          </a:xfrm>
-          <a:prstGeom prst="roundRect">
-            <a:avLst>
-              <a:gd name="adj" fmla="val 14000"/>
-            </a:avLst>
-          </a:prstGeom>
-          <a:solidFill>
-            <a:srgbClr val="FFFFFF"/>
-          </a:solidFill>
-          <a:ln>
-            <a:noFill/>
-          </a:ln>
-          <a:effectLst/>
-        </p:spPr>
-        <p:style>
-          <a:lnRef idx="1">
-            <a:schemeClr val="accent1"/>
-          </a:lnRef>
-          <a:fillRef idx="3">
-            <a:schemeClr val="accent1"/>
-          </a:fillRef>
-          <a:effectRef idx="2">
-            <a:schemeClr val="accent1"/>
-          </a:effectRef>
-          <a:fontRef idx="minor">
-            <a:schemeClr val="lt1"/>
-          </a:fontRef>
-        </p:style>
-        <p:txBody>
-          <a:bodyPr rtlCol="0" anchor="ctr" lIns="164592" wrap="square"/>
-          <a:lstStyle/>
-          <a:p>
-            <a:pPr algn="ctr"/>
-            <a:r>
-              <a:rPr sz="1500" b="1" i="0">
-                <a:solidFill>
-                  <a:srgbClr val="1A1A1A"/>
-                </a:solidFill>
-                <a:latin typeface="Arial"/>
-              </a:rPr>
-              <a:t>Tooling — chosen without lock-in</a:t>
-            </a:r>
-          </a:p>
-        </p:txBody>
-      </p:sp>
-      <p:sp>
-        <p:nvSpPr>
-          <p:cNvPr id="22" name="Rounded Rectangle 21"/>
-          <p:cNvSpPr/>
-          <p:nvPr/>
-        </p:nvSpPr>
-        <p:spPr>
-          <a:xfrm>
-            <a:off x="7452360" y="2825496"/>
-            <a:ext cx="3840480" cy="658368"/>
-          </a:xfrm>
-          <a:prstGeom prst="roundRect">
-            <a:avLst>
-              <a:gd name="adj" fmla="val 14000"/>
-            </a:avLst>
-          </a:prstGeom>
-          <a:solidFill>
-            <a:srgbClr val="FFFFFF"/>
-          </a:solidFill>
-          <a:ln>
-            <a:noFill/>
-          </a:ln>
-          <a:effectLst/>
-        </p:spPr>
-        <p:style>
-          <a:lnRef idx="1">
-            <a:schemeClr val="accent1"/>
-          </a:lnRef>
-          <a:fillRef idx="3">
-            <a:schemeClr val="accent1"/>
-          </a:fillRef>
-          <a:effectRef idx="2">
-            <a:schemeClr val="accent1"/>
-          </a:effectRef>
-          <a:fontRef idx="minor">
-            <a:schemeClr val="lt1"/>
-          </a:fontRef>
-        </p:style>
-        <p:txBody>
-          <a:bodyPr rtlCol="0" anchor="ctr" lIns="164592" wrap="square"/>
-          <a:lstStyle/>
-          <a:p>
-            <a:pPr algn="ctr"/>
-            <a:r>
-              <a:rPr sz="1500" b="1" i="0">
-                <a:solidFill>
-                  <a:srgbClr val="1A1A1A"/>
-                </a:solidFill>
-                <a:latin typeface="Arial"/>
-              </a:rPr>
-              <a:t>Governance — a Board and a gate</a:t>
-            </a:r>
-          </a:p>
-        </p:txBody>
-      </p:sp>
-      <p:sp>
-        <p:nvSpPr>
-          <p:cNvPr id="23" name="Rounded Rectangle 22"/>
-          <p:cNvSpPr/>
-          <p:nvPr/>
-        </p:nvSpPr>
-        <p:spPr>
-          <a:xfrm>
-            <a:off x="7452360" y="3758184"/>
-            <a:ext cx="3840480" cy="658368"/>
-          </a:xfrm>
-          <a:prstGeom prst="roundRect">
-            <a:avLst>
-              <a:gd name="adj" fmla="val 14000"/>
-            </a:avLst>
-          </a:prstGeom>
-          <a:solidFill>
-            <a:srgbClr val="006E96"/>
-          </a:solidFill>
-          <a:ln>
-            <a:noFill/>
-          </a:ln>
-          <a:effectLst/>
-        </p:spPr>
-        <p:style>
-          <a:lnRef idx="1">
-            <a:schemeClr val="accent1"/>
-          </a:lnRef>
-          <a:fillRef idx="3">
-            <a:schemeClr val="accent1"/>
-          </a:fillRef>
-          <a:effectRef idx="2">
-            <a:schemeClr val="accent1"/>
-          </a:effectRef>
-          <a:fontRef idx="minor">
-            <a:schemeClr val="lt1"/>
-          </a:fontRef>
-        </p:style>
-        <p:txBody>
-          <a:bodyPr rtlCol="0" anchor="ctr" lIns="164592" wrap="square"/>
-          <a:lstStyle/>
-          <a:p>
-            <a:pPr algn="ctr"/>
-            <a:r>
-              <a:rPr sz="1500" b="1" i="0">
-                <a:solidFill>
-                  <a:srgbClr val="FFFFFF"/>
-                </a:solidFill>
-                <a:latin typeface="Arial"/>
-              </a:rPr>
-              <a:t>Sustainment — alive past year two</a:t>
-            </a:r>
-          </a:p>
-        </p:txBody>
-      </p:sp>
-      <p:sp>
-        <p:nvSpPr>
-          <p:cNvPr id="24" name="TextBox 23"/>
-          <p:cNvSpPr txBox="1"/>
-          <p:nvPr/>
-        </p:nvSpPr>
-        <p:spPr>
-          <a:xfrm>
-            <a:off x="7452360" y="5806440"/>
-            <a:ext cx="4297680" cy="731520"/>
-          </a:xfrm>
-          <a:prstGeom prst="rect">
-            <a:avLst/>
-          </a:prstGeom>
-          <a:noFill/>
-        </p:spPr>
-        <p:txBody>
-          <a:bodyPr wrap="square">
-            <a:spAutoFit/>
-          </a:bodyPr>
-          <a:lstStyle/>
-          <a:p>
-            <a:r>
-              <a:rPr sz="1200" b="0" i="0">
-                <a:solidFill>
-                  <a:srgbClr val="FFFFFF"/>
-                </a:solidFill>
-                <a:latin typeface="Arial"/>
-              </a:rPr>
-              <a:t>5 gate questions · 4 health metrics · 4 ways a practice fades</a:t>
-            </a:r>
-          </a:p>
-        </p:txBody>
-      </p:sp>
-    </p:spTree>
-    <p:extLst>
-      <p:ext uri="{BB962C8B-B14F-4D97-AF65-F5344CB8AC3E}">
-        <p14:creationId xmlns:p14="http://schemas.microsoft.com/office/powerpoint/2010/main" val="1196800265"/>
-      </p:ext>
-    </p:extLst>
-  </p:cSld>
-  <p:clrMapOvr>
-    <a:masterClrMapping/>
-  </p:clrMapOvr>
-</p:sld>
-</file>
-
-<file path=ppt/slides/slide18.xml><?xml version="1.0" encoding="utf-8"?>
-<p:sld xmlns:a="http://schemas.openxmlformats.org/drawingml/2006/main" xmlns:p="http://schemas.openxmlformats.org/presentationml/2006/main" xmlns:r="http://schemas.openxmlformats.org/officeDocument/2006/relationships">
-  <p:cSld>
-    <p:spTree>
-      <p:nvGrpSpPr>
-        <p:cNvPr id="1" name=""/>
-        <p:cNvGrpSpPr/>
-        <p:nvPr/>
-      </p:nvGrpSpPr>
-      <p:grpSpPr/>
-      <p:sp>
-        <p:nvSpPr>
-          <p:cNvPr id="2" name="TextBox 1"/>
-          <p:cNvSpPr txBox="1"/>
-          <p:nvPr/>
-        </p:nvSpPr>
-        <p:spPr>
-          <a:xfrm>
-            <a:off x="822960" y="822960"/>
-            <a:ext cx="7315200" cy="457200"/>
-          </a:xfrm>
-          <a:prstGeom prst="rect">
-            <a:avLst/>
-          </a:prstGeom>
-          <a:noFill/>
-        </p:spPr>
-        <p:txBody>
-          <a:bodyPr wrap="square">
-            <a:spAutoFit/>
-          </a:bodyPr>
-          <a:lstStyle/>
-          <a:p>
-            <a:r>
-              <a:rPr sz="1200" b="1" i="0">
-                <a:solidFill>
-                  <a:srgbClr val="595959"/>
-                </a:solidFill>
-                <a:latin typeface="Arial"/>
-              </a:rPr>
-              <a:t>KP1 · MODULE 3 · VIDEO 3.3</a:t>
-            </a:r>
-          </a:p>
-        </p:txBody>
-      </p:sp>
-      <p:sp>
-        <p:nvSpPr>
-          <p:cNvPr id="3" name="TextBox 2"/>
-          <p:cNvSpPr txBox="1"/>
-          <p:nvPr/>
-        </p:nvSpPr>
-        <p:spPr>
-          <a:xfrm>
-            <a:off x="822960" y="1828800"/>
-            <a:ext cx="2011680" cy="1097280"/>
-          </a:xfrm>
-          <a:prstGeom prst="rect">
-            <a:avLst/>
-          </a:prstGeom>
-          <a:noFill/>
-        </p:spPr>
-        <p:txBody>
-          <a:bodyPr wrap="square">
-            <a:spAutoFit/>
-          </a:bodyPr>
-          <a:lstStyle/>
-          <a:p>
-            <a:r>
-              <a:rPr sz="6000" b="1" i="0">
-                <a:solidFill>
-                  <a:srgbClr val="009CD6"/>
-                </a:solidFill>
-                <a:latin typeface="Arial"/>
-              </a:rPr>
-              <a:t>3.3</a:t>
-            </a:r>
-          </a:p>
-        </p:txBody>
-      </p:sp>
-      <p:sp>
-        <p:nvSpPr>
-          <p:cNvPr id="4" name="TextBox 3"/>
-          <p:cNvSpPr txBox="1"/>
-          <p:nvPr/>
-        </p:nvSpPr>
-        <p:spPr>
-          <a:xfrm>
-            <a:off x="822960" y="2880360"/>
-            <a:ext cx="9601200" cy="1371600"/>
-          </a:xfrm>
-          <a:prstGeom prst="rect">
-            <a:avLst/>
-          </a:prstGeom>
-          <a:noFill/>
-        </p:spPr>
-        <p:txBody>
-          <a:bodyPr wrap="square">
-            <a:spAutoFit/>
-          </a:bodyPr>
-          <a:lstStyle/>
-          <a:p>
-            <a:r>
-              <a:rPr sz="3400" b="1" i="0">
-                <a:solidFill>
-                  <a:srgbClr val="1A1A1A"/>
-                </a:solidFill>
-                <a:latin typeface="Arial"/>
-              </a:rPr>
-              <a:t>Keep the repository true — the update discipline</a:t>
-            </a:r>
-          </a:p>
-        </p:txBody>
-      </p:sp>
-      <p:sp>
-        <p:nvSpPr>
-          <p:cNvPr id="5" name="TextBox 4"/>
-          <p:cNvSpPr txBox="1"/>
-          <p:nvPr/>
-        </p:nvSpPr>
-        <p:spPr>
-          <a:xfrm>
-            <a:off x="822960" y="4343400"/>
-            <a:ext cx="9875520" cy="1554480"/>
-          </a:xfrm>
-          <a:prstGeom prst="rect">
-            <a:avLst/>
-          </a:prstGeom>
-          <a:noFill/>
-        </p:spPr>
-        <p:txBody>
-          <a:bodyPr wrap="square">
-            <a:spAutoFit/>
-          </a:bodyPr>
-          <a:lstStyle/>
-          <a:p>
-            <a:r>
-              <a:rPr sz="1700" b="0" i="1">
-                <a:solidFill>
-                  <a:srgbClr val="595959"/>
-                </a:solidFill>
-                <a:latin typeface="Arial"/>
-              </a:rPr>
-              <a:t>A repository is only worth what it is current. Decide who owns it, what event triggers an update, and how a change is checked — so the architecture tracks reality instead of slowly becoming a confident work of fiction.</a:t>
-            </a:r>
-          </a:p>
-        </p:txBody>
-      </p:sp>
-      <p:sp>
-        <p:nvSpPr>
-          <p:cNvPr id="6" name="TextBox 5"/>
-          <p:cNvSpPr txBox="1"/>
-          <p:nvPr/>
-        </p:nvSpPr>
-        <p:spPr>
-          <a:xfrm>
-            <a:off x="822960" y="5989320"/>
-            <a:ext cx="7315200" cy="365760"/>
-          </a:xfrm>
-          <a:prstGeom prst="rect">
-            <a:avLst/>
-          </a:prstGeom>
-          <a:noFill/>
-        </p:spPr>
-        <p:txBody>
-          <a:bodyPr wrap="square">
-            <a:spAutoFit/>
-          </a:bodyPr>
-          <a:lstStyle/>
-          <a:p>
-            <a:r>
-              <a:rPr sz="1200" b="0" i="0">
-                <a:solidFill>
-                  <a:srgbClr val="595959"/>
-                </a:solidFill>
-                <a:latin typeface="Arial"/>
-              </a:rPr>
-              <a:t>~4 minutes · standalone video · voice-over on text slides</a:t>
-            </a:r>
-          </a:p>
-        </p:txBody>
-      </p:sp>
-    </p:spTree>
-  </p:cSld>
-  <p:clrMapOvr>
-    <a:masterClrMapping/>
-  </p:clrMapOvr>
-</p:sld>
-</file>
-
-<file path=ppt/slides/slide19.xml><?xml version="1.0" encoding="utf-8"?>
-<p:sld xmlns:a="http://schemas.openxmlformats.org/drawingml/2006/main" xmlns:p="http://schemas.openxmlformats.org/presentationml/2006/main" xmlns:r="http://schemas.openxmlformats.org/officeDocument/2006/relationships">
-  <p:cSld>
-    <p:spTree>
-      <p:nvGrpSpPr>
-        <p:cNvPr id="1" name=""/>
-        <p:cNvGrpSpPr/>
-        <p:nvPr/>
-      </p:nvGrpSpPr>
-      <p:grpSpPr/>
-      <p:sp>
-        <p:nvSpPr>
-          <p:cNvPr id="2" name="Rectangle 1"/>
-          <p:cNvSpPr/>
-          <p:nvPr/>
-        </p:nvSpPr>
-        <p:spPr>
-          <a:xfrm>
-            <a:off x="457200" y="384048"/>
-            <a:ext cx="45720" cy="256032"/>
-          </a:xfrm>
-          <a:prstGeom prst="rect">
-            <a:avLst/>
-          </a:prstGeom>
-          <a:solidFill>
-            <a:srgbClr val="009CD6"/>
-          </a:solidFill>
-          <a:ln>
-            <a:noFill/>
-          </a:ln>
-          <a:effectLst/>
-        </p:spPr>
-        <p:style>
-          <a:lnRef idx="1">
-            <a:schemeClr val="accent1"/>
-          </a:lnRef>
-          <a:fillRef idx="3">
-            <a:schemeClr val="accent1"/>
-          </a:fillRef>
-          <a:effectRef idx="2">
-            <a:schemeClr val="accent1"/>
-          </a:effectRef>
-          <a:fontRef idx="minor">
-            <a:schemeClr val="lt1"/>
-          </a:fontRef>
-        </p:style>
-        <p:txBody>
-          <a:bodyPr rtlCol="0" anchor="ctr"/>
-          <a:lstStyle/>
-          <a:p>
-            <a:pPr algn="ctr"/>
-          </a:p>
-        </p:txBody>
-      </p:sp>
-      <p:sp>
-        <p:nvSpPr>
-          <p:cNvPr id="3" name="TextBox 2"/>
-          <p:cNvSpPr txBox="1"/>
-          <p:nvPr/>
-        </p:nvSpPr>
-        <p:spPr>
-          <a:xfrm>
-            <a:off x="621792" y="274320"/>
-            <a:ext cx="11247120" cy="914400"/>
-          </a:xfrm>
-          <a:prstGeom prst="rect">
-            <a:avLst/>
-          </a:prstGeom>
-          <a:noFill/>
-        </p:spPr>
-        <p:txBody>
-          <a:bodyPr wrap="square">
-            <a:spAutoFit/>
-          </a:bodyPr>
-          <a:lstStyle/>
-          <a:p>
-            <a:r>
-              <a:rPr sz="2800" b="1" i="0">
-                <a:solidFill>
-                  <a:srgbClr val="1A1A1A"/>
-                </a:solidFill>
-                <a:latin typeface="Arial"/>
-              </a:rPr>
-              <a:t>A missing architecture makes people ask questions; a wrong one answers them</a:t>
-            </a:r>
-          </a:p>
-        </p:txBody>
-      </p:sp>
-      <p:sp>
-        <p:nvSpPr>
-          <p:cNvPr id="4" name="TextBox 3"/>
-          <p:cNvSpPr txBox="1"/>
-          <p:nvPr/>
-        </p:nvSpPr>
-        <p:spPr>
-          <a:xfrm>
-            <a:off x="658368" y="1600200"/>
-            <a:ext cx="10881360" cy="2651760"/>
-          </a:xfrm>
-          <a:prstGeom prst="rect">
-            <a:avLst/>
-          </a:prstGeom>
-          <a:noFill/>
-        </p:spPr>
-        <p:txBody>
-          <a:bodyPr wrap="square">
-            <a:spAutoFit/>
-          </a:bodyPr>
-          <a:lstStyle/>
-          <a:p>
-            <a:pPr>
-              <a:spcAft>
-                <a:spcPts val="1200"/>
-              </a:spcAft>
-            </a:pPr>
-            <a:r>
-              <a:rPr sz="2000" b="0" i="0">
-                <a:solidFill>
-                  <a:srgbClr val="1A1A1A"/>
-                </a:solidFill>
-                <a:latin typeface="Arial"/>
-              </a:rPr>
-              <a:t>If the repository says the Examination Authority consumes the Learner Registry, and in reality it quietly built its own copy last quarter, then every decision made on the repository is built on a falsehood.</a:t>
-            </a:r>
-          </a:p>
-        </p:txBody>
-      </p:sp>
-      <p:sp>
-        <p:nvSpPr>
-          <p:cNvPr id="5" name="Rounded Rectangle 4"/>
-          <p:cNvSpPr/>
-          <p:nvPr/>
-        </p:nvSpPr>
-        <p:spPr>
-          <a:xfrm>
-            <a:off x="658368" y="4434840"/>
-            <a:ext cx="10881360" cy="1325880"/>
-          </a:xfrm>
-          <a:prstGeom prst="roundRect">
-            <a:avLst>
-              <a:gd name="adj" fmla="val 4500"/>
-            </a:avLst>
-          </a:prstGeom>
-          <a:solidFill>
-            <a:srgbClr val="E5F5FB"/>
-          </a:solidFill>
-          <a:ln>
-            <a:noFill/>
-          </a:ln>
-          <a:effectLst/>
-        </p:spPr>
-        <p:style>
-          <a:lnRef idx="1">
-            <a:schemeClr val="accent1"/>
-          </a:lnRef>
-          <a:fillRef idx="3">
-            <a:schemeClr val="accent1"/>
-          </a:fillRef>
-          <a:effectRef idx="2">
-            <a:schemeClr val="accent1"/>
-          </a:effectRef>
-          <a:fontRef idx="minor">
-            <a:schemeClr val="lt1"/>
-          </a:fontRef>
-        </p:style>
-        <p:txBody>
-          <a:bodyPr rtlCol="0" anchor="ctr"/>
-          <a:lstStyle/>
-          <a:p>
-            <a:pPr algn="ctr"/>
-          </a:p>
-        </p:txBody>
-      </p:sp>
-      <p:sp>
-        <p:nvSpPr>
-          <p:cNvPr id="6" name="TextBox 5"/>
-          <p:cNvSpPr txBox="1"/>
-          <p:nvPr/>
-        </p:nvSpPr>
-        <p:spPr>
-          <a:xfrm>
-            <a:off x="859536" y="4626864"/>
-            <a:ext cx="10479024" cy="1051560"/>
-          </a:xfrm>
-          <a:prstGeom prst="rect">
-            <a:avLst/>
-          </a:prstGeom>
-          <a:noFill/>
-        </p:spPr>
-        <p:txBody>
-          <a:bodyPr wrap="square">
-            <a:spAutoFit/>
-          </a:bodyPr>
-          <a:lstStyle/>
-          <a:p>
-            <a:pPr>
-              <a:spcAft>
-                <a:spcPts val="700"/>
-              </a:spcAft>
-            </a:pPr>
-            <a:r>
-              <a:rPr sz="2300" b="1" i="0">
-                <a:solidFill>
-                  <a:srgbClr val="006E96"/>
-                </a:solidFill>
-                <a:latin typeface="Arial"/>
-              </a:rPr>
-              <a:t>Currency is not a nice-to-have. It is the whole value.</a:t>
-            </a:r>
-          </a:p>
-        </p:txBody>
-      </p:sp>
-      <p:sp>
-        <p:nvSpPr>
-          <p:cNvPr id="7" name="TextBox 6"/>
-          <p:cNvSpPr txBox="1"/>
-          <p:nvPr/>
-        </p:nvSpPr>
-        <p:spPr>
-          <a:xfrm>
-            <a:off x="457200" y="6473952"/>
-            <a:ext cx="7772400" cy="292608"/>
-          </a:xfrm>
-          <a:prstGeom prst="rect">
-            <a:avLst/>
-          </a:prstGeom>
-          <a:noFill/>
-        </p:spPr>
-        <p:txBody>
-          <a:bodyPr wrap="square">
-            <a:spAutoFit/>
-          </a:bodyPr>
-          <a:lstStyle/>
-          <a:p>
-            <a:r>
-              <a:rPr sz="900" b="0" i="0">
-                <a:solidFill>
-                  <a:srgbClr val="595959"/>
-                </a:solidFill>
-                <a:latin typeface="Arial"/>
-              </a:rPr>
-              <a:t>3.3 · Keep the repository true — the update discipline</a:t>
-            </a:r>
-          </a:p>
-        </p:txBody>
-      </p:sp>
-    </p:spTree>
-  </p:cSld>
-  <p:clrMapOvr>
-    <a:masterClrMapping/>
-  </p:clrMapOvr>
-</p:sld>
-</file>
-
 <file path=ppt/slides/slide20.xml><?xml version="1.0" encoding="utf-8"?>
 <p:sld xmlns:a="http://schemas.openxmlformats.org/drawingml/2006/main" xmlns:p="http://schemas.openxmlformats.org/presentationml/2006/main" xmlns:r="http://schemas.openxmlformats.org/officeDocument/2006/relationships">
   <p:cSld>
@@ -12772,58 +11673,14 @@
       <p:grpSpPr/>
       <p:sp>
         <p:nvSpPr>
-          <p:cNvPr id="2" name="Rectangle 1"/>
-          <p:cNvSpPr/>
-          <p:nvPr/>
-        </p:nvSpPr>
-        <p:spPr>
-          <a:xfrm>
-            <a:off x="457200" y="384048"/>
-            <a:ext cx="45720" cy="256032"/>
-          </a:xfrm>
-          <a:prstGeom prst="rect">
-            <a:avLst/>
-          </a:prstGeom>
-          <a:solidFill>
-            <a:srgbClr val="009CD6"/>
-          </a:solidFill>
-          <a:ln>
-            <a:noFill/>
-          </a:ln>
-          <a:effectLst/>
-        </p:spPr>
-        <p:style>
-          <a:lnRef idx="1">
-            <a:schemeClr val="accent1"/>
-          </a:lnRef>
-          <a:fillRef idx="3">
-            <a:schemeClr val="accent1"/>
-          </a:fillRef>
-          <a:effectRef idx="2">
-            <a:schemeClr val="accent1"/>
-          </a:effectRef>
-          <a:fontRef idx="minor">
-            <a:schemeClr val="lt1"/>
-          </a:fontRef>
-        </p:style>
-        <p:txBody>
-          <a:bodyPr rtlCol="0" anchor="ctr"/>
-          <a:lstStyle/>
-          <a:p>
-            <a:pPr algn="ctr"/>
-          </a:p>
-        </p:txBody>
-      </p:sp>
-      <p:sp>
-        <p:nvSpPr>
-          <p:cNvPr id="3" name="TextBox 2"/>
+          <p:cNvPr id="2" name="TextBox 1"/>
           <p:cNvSpPr txBox="1"/>
           <p:nvPr/>
         </p:nvSpPr>
         <p:spPr>
           <a:xfrm>
-            <a:off x="621792" y="274320"/>
-            <a:ext cx="11247120" cy="914400"/>
+            <a:off x="822960" y="822960"/>
+            <a:ext cx="7315200" cy="457200"/>
           </a:xfrm>
           <a:prstGeom prst="rect">
             <a:avLst/>
@@ -12837,27 +11694,95 @@
           <a:lstStyle/>
           <a:p>
             <a:r>
-              <a:rPr sz="2800" b="1" i="0">
+              <a:rPr sz="1200" b="1" i="0">
+                <a:solidFill>
+                  <a:srgbClr val="595959"/>
+                </a:solidFill>
+                <a:latin typeface="Arial"/>
+              </a:rPr>
+              <a:t>KP1 · MODULE 3 · VIDEO 3.3</a:t>
+            </a:r>
+          </a:p>
+        </p:txBody>
+      </p:sp>
+      <p:sp>
+        <p:nvSpPr>
+          <p:cNvPr id="3" name="TextBox 2"/>
+          <p:cNvSpPr txBox="1"/>
+          <p:nvPr/>
+        </p:nvSpPr>
+        <p:spPr>
+          <a:xfrm>
+            <a:off x="822960" y="1828800"/>
+            <a:ext cx="2011680" cy="1097280"/>
+          </a:xfrm>
+          <a:prstGeom prst="rect">
+            <a:avLst/>
+          </a:prstGeom>
+          <a:noFill/>
+        </p:spPr>
+        <p:txBody>
+          <a:bodyPr wrap="square">
+            <a:spAutoFit/>
+          </a:bodyPr>
+          <a:lstStyle/>
+          <a:p>
+            <a:r>
+              <a:rPr sz="6000" b="1" i="0">
+                <a:solidFill>
+                  <a:srgbClr val="009CD6"/>
+                </a:solidFill>
+                <a:latin typeface="Arial"/>
+              </a:rPr>
+              <a:t>3.3</a:t>
+            </a:r>
+          </a:p>
+        </p:txBody>
+      </p:sp>
+      <p:sp>
+        <p:nvSpPr>
+          <p:cNvPr id="4" name="TextBox 3"/>
+          <p:cNvSpPr txBox="1"/>
+          <p:nvPr/>
+        </p:nvSpPr>
+        <p:spPr>
+          <a:xfrm>
+            <a:off x="822960" y="2880360"/>
+            <a:ext cx="9601200" cy="1371600"/>
+          </a:xfrm>
+          <a:prstGeom prst="rect">
+            <a:avLst/>
+          </a:prstGeom>
+          <a:noFill/>
+        </p:spPr>
+        <p:txBody>
+          <a:bodyPr wrap="square">
+            <a:spAutoFit/>
+          </a:bodyPr>
+          <a:lstStyle/>
+          <a:p>
+            <a:r>
+              <a:rPr sz="3400" b="1" i="0">
                 <a:solidFill>
                   <a:srgbClr val="1A1A1A"/>
                 </a:solidFill>
                 <a:latin typeface="Arial"/>
               </a:rPr>
-              <a:t>When everyone owns currency, no one does</a:t>
-            </a:r>
-          </a:p>
-        </p:txBody>
-      </p:sp>
-      <p:sp>
-        <p:nvSpPr>
-          <p:cNvPr id="4" name="TextBox 3"/>
+              <a:t>Keep the repository true — the update discipline</a:t>
+            </a:r>
+          </a:p>
+        </p:txBody>
+      </p:sp>
+      <p:sp>
+        <p:nvSpPr>
+          <p:cNvPr id="5" name="TextBox 4"/>
           <p:cNvSpPr txBox="1"/>
           <p:nvPr/>
         </p:nvSpPr>
         <p:spPr>
           <a:xfrm>
-            <a:off x="658368" y="1600200"/>
-            <a:ext cx="10881360" cy="2651760"/>
+            <a:off x="822960" y="4343400"/>
+            <a:ext cx="9875520" cy="1554480"/>
           </a:xfrm>
           <a:prstGeom prst="rect">
             <a:avLst/>
@@ -12870,154 +11795,48 @@
           </a:bodyPr>
           <a:lstStyle/>
           <a:p>
-            <a:pPr>
-              <a:spcAft>
-                <a:spcPts val="1200"/>
-              </a:spcAft>
-            </a:pPr>
-            <a:r>
-              <a:rPr sz="2000" b="0" i="0">
-                <a:solidFill>
-                  <a:srgbClr val="1A1A1A"/>
-                </a:solidFill>
-                <a:latin typeface="Arial"/>
-              </a:rPr>
-              <a:t>One person — usually the chief architect, or a named custodian on the EA team — is accountable for the repository being current. Not a committee. Not everyone.</a:t>
-            </a:r>
-          </a:p>
-          <a:p>
-            <a:pPr>
-              <a:spcAft>
-                <a:spcPts val="1200"/>
-              </a:spcAft>
-            </a:pPr>
-            <a:r>
-              <a:rPr sz="2000" b="0" i="0">
-                <a:solidFill>
-                  <a:srgbClr val="1A1A1A"/>
-                </a:solidFill>
-                <a:latin typeface="Arial"/>
-              </a:rPr>
-              <a:t>That person does not do all the updating. They are answerable for whether the picture is true.</a:t>
-            </a:r>
-          </a:p>
-        </p:txBody>
-      </p:sp>
-      <p:sp>
-        <p:nvSpPr>
-          <p:cNvPr id="5" name="Rounded Rectangle 4"/>
-          <p:cNvSpPr/>
-          <p:nvPr/>
-        </p:nvSpPr>
-        <p:spPr>
-          <a:xfrm>
-            <a:off x="658368" y="4434840"/>
-            <a:ext cx="10881360" cy="1325880"/>
-          </a:xfrm>
-          <a:prstGeom prst="roundRect">
-            <a:avLst>
-              <a:gd name="adj" fmla="val 4500"/>
-            </a:avLst>
-          </a:prstGeom>
-          <a:solidFill>
-            <a:srgbClr val="E5F5FB"/>
-          </a:solidFill>
-          <a:ln>
-            <a:noFill/>
-          </a:ln>
-          <a:effectLst/>
-        </p:spPr>
-        <p:style>
-          <a:lnRef idx="1">
-            <a:schemeClr val="accent1"/>
-          </a:lnRef>
-          <a:fillRef idx="3">
-            <a:schemeClr val="accent1"/>
-          </a:fillRef>
-          <a:effectRef idx="2">
-            <a:schemeClr val="accent1"/>
-          </a:effectRef>
-          <a:fontRef idx="minor">
-            <a:schemeClr val="lt1"/>
-          </a:fontRef>
-        </p:style>
-        <p:txBody>
-          <a:bodyPr rtlCol="0" anchor="ctr"/>
-          <a:lstStyle/>
-          <a:p>
-            <a:pPr algn="ctr"/>
-          </a:p>
-        </p:txBody>
-      </p:sp>
-      <p:sp>
-        <p:nvSpPr>
-          <p:cNvPr id="6" name="TextBox 5"/>
-          <p:cNvSpPr txBox="1"/>
-          <p:nvPr/>
-        </p:nvSpPr>
-        <p:spPr>
-          <a:xfrm>
-            <a:off x="859536" y="4626864"/>
-            <a:ext cx="10479024" cy="1051560"/>
-          </a:xfrm>
-          <a:prstGeom prst="rect">
-            <a:avLst/>
-          </a:prstGeom>
-          <a:noFill/>
-        </p:spPr>
-        <p:txBody>
-          <a:bodyPr wrap="square">
-            <a:spAutoFit/>
-          </a:bodyPr>
-          <a:lstStyle/>
-          <a:p>
-            <a:pPr>
-              <a:spcAft>
-                <a:spcPts val="700"/>
-              </a:spcAft>
-            </a:pPr>
-            <a:r>
-              <a:rPr sz="2300" b="1" i="0">
-                <a:solidFill>
-                  <a:srgbClr val="006E96"/>
-                </a:solidFill>
-                <a:latin typeface="Arial"/>
-              </a:rPr>
-              <a:t>One name, one accountability.</a:t>
-            </a:r>
-          </a:p>
-        </p:txBody>
-      </p:sp>
-      <p:sp>
-        <p:nvSpPr>
-          <p:cNvPr id="7" name="TextBox 6"/>
-          <p:cNvSpPr txBox="1"/>
-          <p:nvPr/>
-        </p:nvSpPr>
-        <p:spPr>
-          <a:xfrm>
-            <a:off x="457200" y="6473952"/>
-            <a:ext cx="7772400" cy="292608"/>
-          </a:xfrm>
-          <a:prstGeom prst="rect">
-            <a:avLst/>
-          </a:prstGeom>
-          <a:noFill/>
-        </p:spPr>
-        <p:txBody>
-          <a:bodyPr wrap="square">
-            <a:spAutoFit/>
-          </a:bodyPr>
-          <a:lstStyle/>
-          <a:p>
-            <a:r>
-              <a:rPr sz="900" b="0" i="0">
+            <a:r>
+              <a:rPr sz="1700" b="0" i="1">
                 <a:solidFill>
                   <a:srgbClr val="595959"/>
                 </a:solidFill>
                 <a:latin typeface="Arial"/>
               </a:rPr>
-              <a:t>3.3 · Keep the repository true — the update discipline</a:t>
+              <a:t>A repository is only worth what it is current. Decide who owns it, what event triggers an update, and how a change is checked — so the architecture tracks reality instead of slowly becoming a confident work of fiction.</a:t>
+            </a:r>
+          </a:p>
+        </p:txBody>
+      </p:sp>
+      <p:sp>
+        <p:nvSpPr>
+          <p:cNvPr id="6" name="TextBox 5"/>
+          <p:cNvSpPr txBox="1"/>
+          <p:nvPr/>
+        </p:nvSpPr>
+        <p:spPr>
+          <a:xfrm>
+            <a:off x="822960" y="5989320"/>
+            <a:ext cx="7315200" cy="365760"/>
+          </a:xfrm>
+          <a:prstGeom prst="rect">
+            <a:avLst/>
+          </a:prstGeom>
+          <a:noFill/>
+        </p:spPr>
+        <p:txBody>
+          <a:bodyPr wrap="square">
+            <a:spAutoFit/>
+          </a:bodyPr>
+          <a:lstStyle/>
+          <a:p>
+            <a:r>
+              <a:rPr sz="1200" b="0" i="0">
+                <a:solidFill>
+                  <a:srgbClr val="595959"/>
+                </a:solidFill>
+                <a:latin typeface="Arial"/>
+              </a:rPr>
+              <a:t>~4 minutes · standalone video · voice-over on text slides</a:t>
             </a:r>
           </a:p>
         </p:txBody>
@@ -13042,58 +11861,14 @@
       <p:grpSpPr/>
       <p:sp>
         <p:nvSpPr>
-          <p:cNvPr id="2" name="Rectangle 1"/>
-          <p:cNvSpPr/>
-          <p:nvPr/>
-        </p:nvSpPr>
-        <p:spPr>
-          <a:xfrm>
-            <a:off x="457200" y="384048"/>
-            <a:ext cx="45720" cy="256032"/>
-          </a:xfrm>
-          <a:prstGeom prst="rect">
-            <a:avLst/>
-          </a:prstGeom>
-          <a:solidFill>
-            <a:srgbClr val="009CD6"/>
-          </a:solidFill>
-          <a:ln>
-            <a:noFill/>
-          </a:ln>
-          <a:effectLst/>
-        </p:spPr>
-        <p:style>
-          <a:lnRef idx="1">
-            <a:schemeClr val="accent1"/>
-          </a:lnRef>
-          <a:fillRef idx="3">
-            <a:schemeClr val="accent1"/>
-          </a:fillRef>
-          <a:effectRef idx="2">
-            <a:schemeClr val="accent1"/>
-          </a:effectRef>
-          <a:fontRef idx="minor">
-            <a:schemeClr val="lt1"/>
-          </a:fontRef>
-        </p:style>
-        <p:txBody>
-          <a:bodyPr rtlCol="0" anchor="ctr"/>
-          <a:lstStyle/>
-          <a:p>
-            <a:pPr algn="ctr"/>
-          </a:p>
-        </p:txBody>
-      </p:sp>
-      <p:sp>
-        <p:nvSpPr>
-          <p:cNvPr id="3" name="TextBox 2"/>
+          <p:cNvPr id="2" name="TextBox 1"/>
           <p:cNvSpPr txBox="1"/>
           <p:nvPr/>
         </p:nvSpPr>
         <p:spPr>
           <a:xfrm>
-            <a:off x="621792" y="274320"/>
-            <a:ext cx="11247120" cy="914400"/>
+            <a:off x="1005840" y="1325880"/>
+            <a:ext cx="5486400" cy="365760"/>
           </a:xfrm>
           <a:prstGeom prst="rect">
             <a:avLst/>
@@ -13107,80 +11882,61 @@
           <a:lstStyle/>
           <a:p>
             <a:r>
-              <a:rPr sz="2800" b="1" i="0">
+              <a:rPr sz="1200" b="1" i="0">
+                <a:solidFill>
+                  <a:srgbClr val="006E96"/>
+                </a:solidFill>
+                <a:latin typeface="Arial"/>
+              </a:rPr>
+              <a:t>WHERE WE START</a:t>
+            </a:r>
+          </a:p>
+        </p:txBody>
+      </p:sp>
+      <p:sp>
+        <p:nvSpPr>
+          <p:cNvPr id="3" name="TextBox 2"/>
+          <p:cNvSpPr txBox="1"/>
+          <p:nvPr/>
+        </p:nvSpPr>
+        <p:spPr>
+          <a:xfrm>
+            <a:off x="1005840" y="1783080"/>
+            <a:ext cx="10149840" cy="1737360"/>
+          </a:xfrm>
+          <a:prstGeom prst="rect">
+            <a:avLst/>
+          </a:prstGeom>
+          <a:noFill/>
+        </p:spPr>
+        <p:txBody>
+          <a:bodyPr wrap="square">
+            <a:spAutoFit/>
+          </a:bodyPr>
+          <a:lstStyle/>
+          <a:p>
+            <a:r>
+              <a:rPr sz="3000" b="1" i="0">
                 <a:solidFill>
                   <a:srgbClr val="1A1A1A"/>
                 </a:solidFill>
                 <a:latin typeface="Arial"/>
               </a:rPr>
-              <a:t>Tie updates to events, because a yearly review is eleven months stale</a:t>
-            </a:r>
-          </a:p>
-        </p:txBody>
-      </p:sp>
-      <p:sp>
-        <p:nvSpPr>
-          <p:cNvPr id="4" name="Oval 3"/>
-          <p:cNvSpPr/>
-          <p:nvPr/>
-        </p:nvSpPr>
-        <p:spPr>
-          <a:xfrm>
-            <a:off x="621792" y="1508760"/>
-            <a:ext cx="310896" cy="310896"/>
-          </a:xfrm>
-          <a:prstGeom prst="ellipse">
-            <a:avLst/>
-          </a:prstGeom>
-          <a:solidFill>
-            <a:srgbClr val="009CD6"/>
-          </a:solidFill>
-          <a:ln>
-            <a:noFill/>
-          </a:ln>
-          <a:effectLst/>
-        </p:spPr>
-        <p:style>
-          <a:lnRef idx="1">
-            <a:schemeClr val="accent1"/>
-          </a:lnRef>
-          <a:fillRef idx="3">
-            <a:schemeClr val="accent1"/>
-          </a:fillRef>
-          <a:effectRef idx="2">
-            <a:schemeClr val="accent1"/>
-          </a:effectRef>
-          <a:fontRef idx="minor">
-            <a:schemeClr val="lt1"/>
-          </a:fontRef>
-        </p:style>
-        <p:txBody>
-          <a:bodyPr rtlCol="0" anchor="ctr" lIns="0" rIns="0" tIns="0" bIns="0" wrap="square"/>
-          <a:lstStyle/>
-          <a:p>
-            <a:pPr algn="ctr"/>
-            <a:r>
-              <a:rPr sz="1300" b="1" i="0">
-                <a:solidFill>
-                  <a:srgbClr val="FFFFFF"/>
-                </a:solidFill>
-                <a:latin typeface="Arial"/>
-              </a:rPr>
-              <a:t>1</a:t>
-            </a:r>
-          </a:p>
-        </p:txBody>
-      </p:sp>
-      <p:sp>
-        <p:nvSpPr>
-          <p:cNvPr id="5" name="TextBox 4"/>
+              <a:t>A repository has one enemy, and it is not technical.</a:t>
+            </a:r>
+          </a:p>
+        </p:txBody>
+      </p:sp>
+      <p:sp>
+        <p:nvSpPr>
+          <p:cNvPr id="4" name="TextBox 3"/>
           <p:cNvSpPr txBox="1"/>
           <p:nvPr/>
         </p:nvSpPr>
         <p:spPr>
           <a:xfrm>
-            <a:off x="1115568" y="1463040"/>
-            <a:ext cx="10527487" cy="1028699"/>
+            <a:off x="1005840" y="3611880"/>
+            <a:ext cx="10149840" cy="2377440"/>
           </a:xfrm>
           <a:prstGeom prst="rect">
             <a:avLst/>
@@ -13195,530 +11951,56 @@
           <a:p>
             <a:pPr>
               <a:spcAft>
-                <a:spcPts val="300"/>
+                <a:spcPts val="800"/>
               </a:spcAft>
             </a:pPr>
             <a:r>
-              <a:rPr sz="1900" b="1" i="0">
-                <a:solidFill>
-                  <a:srgbClr val="1A1A1A"/>
-                </a:solidFill>
-                <a:latin typeface="Arial"/>
-              </a:rPr>
-              <a:t>A system goes live</a:t>
-            </a:r>
-          </a:p>
-          <a:p>
-            <a:pPr>
-              <a:spcAft>
-                <a:spcPts val="300"/>
-              </a:spcAft>
-            </a:pPr>
-            <a:r>
-              <a:rPr sz="1550" b="0" i="0">
+              <a:rPr sz="1700" b="0" i="0">
                 <a:solidFill>
                   <a:srgbClr val="595959"/>
                 </a:solidFill>
                 <a:latin typeface="Arial"/>
               </a:rPr>
-              <a:t>Update the application layer.</a:t>
-            </a:r>
-          </a:p>
-        </p:txBody>
-      </p:sp>
-      <p:sp>
-        <p:nvSpPr>
-          <p:cNvPr id="6" name="Rectangle 5"/>
-          <p:cNvSpPr/>
-          <p:nvPr/>
-        </p:nvSpPr>
-        <p:spPr>
-          <a:xfrm>
-            <a:off x="621792" y="2496312"/>
-            <a:ext cx="10881360" cy="12700"/>
-          </a:xfrm>
-          <a:prstGeom prst="rect">
-            <a:avLst/>
-          </a:prstGeom>
-          <a:solidFill>
-            <a:srgbClr val="DDECF4"/>
-          </a:solidFill>
-          <a:ln>
-            <a:noFill/>
-          </a:ln>
-          <a:effectLst/>
-        </p:spPr>
-        <p:style>
-          <a:lnRef idx="1">
-            <a:schemeClr val="accent1"/>
-          </a:lnRef>
-          <a:fillRef idx="3">
-            <a:schemeClr val="accent1"/>
-          </a:fillRef>
-          <a:effectRef idx="2">
-            <a:schemeClr val="accent1"/>
-          </a:effectRef>
-          <a:fontRef idx="minor">
-            <a:schemeClr val="lt1"/>
-          </a:fontRef>
-        </p:style>
-        <p:txBody>
-          <a:bodyPr rtlCol="0" anchor="ctr"/>
-          <a:lstStyle/>
-          <a:p>
-            <a:pPr algn="ctr"/>
-          </a:p>
-        </p:txBody>
-      </p:sp>
-      <p:sp>
-        <p:nvSpPr>
-          <p:cNvPr id="7" name="Oval 6"/>
-          <p:cNvSpPr/>
-          <p:nvPr/>
-        </p:nvSpPr>
-        <p:spPr>
-          <a:xfrm>
-            <a:off x="621792" y="2583179"/>
-            <a:ext cx="310896" cy="310896"/>
-          </a:xfrm>
-          <a:prstGeom prst="ellipse">
-            <a:avLst/>
-          </a:prstGeom>
-          <a:solidFill>
-            <a:srgbClr val="009CD6"/>
-          </a:solidFill>
-          <a:ln>
-            <a:noFill/>
-          </a:ln>
-          <a:effectLst/>
-        </p:spPr>
-        <p:style>
-          <a:lnRef idx="1">
-            <a:schemeClr val="accent1"/>
-          </a:lnRef>
-          <a:fillRef idx="3">
-            <a:schemeClr val="accent1"/>
-          </a:fillRef>
-          <a:effectRef idx="2">
-            <a:schemeClr val="accent1"/>
-          </a:effectRef>
-          <a:fontRef idx="minor">
-            <a:schemeClr val="lt1"/>
-          </a:fontRef>
-        </p:style>
-        <p:txBody>
-          <a:bodyPr rtlCol="0" anchor="ctr" lIns="0" rIns="0" tIns="0" bIns="0" wrap="square"/>
-          <a:lstStyle/>
-          <a:p>
-            <a:pPr algn="ctr"/>
-            <a:r>
-              <a:rPr sz="1300" b="1" i="0">
-                <a:solidFill>
-                  <a:srgbClr val="FFFFFF"/>
-                </a:solidFill>
-                <a:latin typeface="Arial"/>
-              </a:rPr>
-              <a:t>2</a:t>
-            </a:r>
-          </a:p>
-        </p:txBody>
-      </p:sp>
-      <p:sp>
-        <p:nvSpPr>
-          <p:cNvPr id="8" name="TextBox 7"/>
-          <p:cNvSpPr txBox="1"/>
-          <p:nvPr/>
-        </p:nvSpPr>
-        <p:spPr>
-          <a:xfrm>
-            <a:off x="1115568" y="2537460"/>
-            <a:ext cx="10527487" cy="1028699"/>
-          </a:xfrm>
-          <a:prstGeom prst="rect">
-            <a:avLst/>
-          </a:prstGeom>
-          <a:noFill/>
-        </p:spPr>
-        <p:txBody>
-          <a:bodyPr wrap="square">
-            <a:spAutoFit/>
-          </a:bodyPr>
-          <a:lstStyle/>
+              <a:t>Staleness.</a:t>
+            </a:r>
+          </a:p>
           <a:p>
             <a:pPr>
               <a:spcAft>
-                <a:spcPts val="300"/>
+                <a:spcPts val="800"/>
               </a:spcAft>
             </a:pPr>
             <a:r>
-              <a:rPr sz="1900" b="1" i="0">
-                <a:solidFill>
-                  <a:srgbClr val="1A1A1A"/>
-                </a:solidFill>
-                <a:latin typeface="Arial"/>
-              </a:rPr>
-              <a:t>A system is retired</a:t>
-            </a:r>
-          </a:p>
-          <a:p>
-            <a:pPr>
-              <a:spcAft>
-                <a:spcPts val="300"/>
-              </a:spcAft>
-            </a:pPr>
-            <a:r>
-              <a:rPr sz="1550" b="0" i="0">
+              <a:rPr sz="1700" b="0" i="0">
                 <a:solidFill>
                   <a:srgbClr val="595959"/>
                 </a:solidFill>
                 <a:latin typeface="Arial"/>
               </a:rPr>
-              <a:t>Remove it.</a:t>
-            </a:r>
-          </a:p>
-        </p:txBody>
-      </p:sp>
-      <p:sp>
-        <p:nvSpPr>
-          <p:cNvPr id="9" name="Rectangle 8"/>
-          <p:cNvSpPr/>
-          <p:nvPr/>
-        </p:nvSpPr>
-        <p:spPr>
-          <a:xfrm>
-            <a:off x="621792" y="3570732"/>
-            <a:ext cx="10881360" cy="12700"/>
-          </a:xfrm>
-          <a:prstGeom prst="rect">
-            <a:avLst/>
-          </a:prstGeom>
-          <a:solidFill>
-            <a:srgbClr val="DDECF4"/>
-          </a:solidFill>
-          <a:ln>
-            <a:noFill/>
-          </a:ln>
-          <a:effectLst/>
-        </p:spPr>
-        <p:style>
-          <a:lnRef idx="1">
-            <a:schemeClr val="accent1"/>
-          </a:lnRef>
-          <a:fillRef idx="3">
-            <a:schemeClr val="accent1"/>
-          </a:fillRef>
-          <a:effectRef idx="2">
-            <a:schemeClr val="accent1"/>
-          </a:effectRef>
-          <a:fontRef idx="minor">
-            <a:schemeClr val="lt1"/>
-          </a:fontRef>
-        </p:style>
-        <p:txBody>
-          <a:bodyPr rtlCol="0" anchor="ctr"/>
-          <a:lstStyle/>
-          <a:p>
-            <a:pPr algn="ctr"/>
-          </a:p>
-        </p:txBody>
-      </p:sp>
-      <p:sp>
-        <p:nvSpPr>
-          <p:cNvPr id="10" name="Oval 9"/>
-          <p:cNvSpPr/>
-          <p:nvPr/>
-        </p:nvSpPr>
-        <p:spPr>
-          <a:xfrm>
-            <a:off x="621792" y="3657599"/>
-            <a:ext cx="310896" cy="310896"/>
-          </a:xfrm>
-          <a:prstGeom prst="ellipse">
-            <a:avLst/>
-          </a:prstGeom>
-          <a:solidFill>
-            <a:srgbClr val="009CD6"/>
-          </a:solidFill>
-          <a:ln>
-            <a:noFill/>
-          </a:ln>
-          <a:effectLst/>
-        </p:spPr>
-        <p:style>
-          <a:lnRef idx="1">
-            <a:schemeClr val="accent1"/>
-          </a:lnRef>
-          <a:fillRef idx="3">
-            <a:schemeClr val="accent1"/>
-          </a:fillRef>
-          <a:effectRef idx="2">
-            <a:schemeClr val="accent1"/>
-          </a:effectRef>
-          <a:fontRef idx="minor">
-            <a:schemeClr val="lt1"/>
-          </a:fontRef>
-        </p:style>
-        <p:txBody>
-          <a:bodyPr rtlCol="0" anchor="ctr" lIns="0" rIns="0" tIns="0" bIns="0" wrap="square"/>
-          <a:lstStyle/>
-          <a:p>
-            <a:pPr algn="ctr"/>
-            <a:r>
-              <a:rPr sz="1300" b="1" i="0">
-                <a:solidFill>
-                  <a:srgbClr val="FFFFFF"/>
-                </a:solidFill>
-                <a:latin typeface="Arial"/>
-              </a:rPr>
-              <a:t>3</a:t>
-            </a:r>
-          </a:p>
-        </p:txBody>
-      </p:sp>
-      <p:sp>
-        <p:nvSpPr>
-          <p:cNvPr id="11" name="TextBox 10"/>
-          <p:cNvSpPr txBox="1"/>
-          <p:nvPr/>
-        </p:nvSpPr>
-        <p:spPr>
-          <a:xfrm>
-            <a:off x="1115568" y="3611879"/>
-            <a:ext cx="10527487" cy="1028699"/>
-          </a:xfrm>
-          <a:prstGeom prst="rect">
-            <a:avLst/>
-          </a:prstGeom>
-          <a:noFill/>
-        </p:spPr>
-        <p:txBody>
-          <a:bodyPr wrap="square">
-            <a:spAutoFit/>
-          </a:bodyPr>
-          <a:lstStyle/>
+              <a:t>An architecture six months behind reality is worse than none — people trust it, and it lies to them.</a:t>
+            </a:r>
+          </a:p>
           <a:p>
             <a:pPr>
               <a:spcAft>
-                <a:spcPts val="300"/>
+                <a:spcPts val="800"/>
               </a:spcAft>
             </a:pPr>
             <a:r>
-              <a:rPr sz="1900" b="1" i="0">
-                <a:solidFill>
-                  <a:srgbClr val="1A1A1A"/>
-                </a:solidFill>
-                <a:latin typeface="Arial"/>
-              </a:rPr>
-              <a:t>A new data domain appears</a:t>
-            </a:r>
-          </a:p>
-          <a:p>
-            <a:pPr>
-              <a:spcAft>
-                <a:spcPts val="300"/>
-              </a:spcAft>
-            </a:pPr>
-            <a:r>
-              <a:rPr sz="1550" b="0" i="0">
+              <a:rPr sz="1700" b="0" i="0">
                 <a:solidFill>
                   <a:srgbClr val="595959"/>
                 </a:solidFill>
                 <a:latin typeface="Arial"/>
               </a:rPr>
-              <a:t>Add it, with its owner.</a:t>
-            </a:r>
-          </a:p>
-        </p:txBody>
-      </p:sp>
-      <p:sp>
-        <p:nvSpPr>
-          <p:cNvPr id="12" name="Rectangle 11"/>
-          <p:cNvSpPr/>
-          <p:nvPr/>
-        </p:nvSpPr>
-        <p:spPr>
-          <a:xfrm>
-            <a:off x="621792" y="4645152"/>
-            <a:ext cx="10881360" cy="12700"/>
-          </a:xfrm>
-          <a:prstGeom prst="rect">
-            <a:avLst/>
-          </a:prstGeom>
-          <a:solidFill>
-            <a:srgbClr val="DDECF4"/>
-          </a:solidFill>
-          <a:ln>
-            <a:noFill/>
-          </a:ln>
-          <a:effectLst/>
-        </p:spPr>
-        <p:style>
-          <a:lnRef idx="1">
-            <a:schemeClr val="accent1"/>
-          </a:lnRef>
-          <a:fillRef idx="3">
-            <a:schemeClr val="accent1"/>
-          </a:fillRef>
-          <a:effectRef idx="2">
-            <a:schemeClr val="accent1"/>
-          </a:effectRef>
-          <a:fontRef idx="minor">
-            <a:schemeClr val="lt1"/>
-          </a:fontRef>
-        </p:style>
-        <p:txBody>
-          <a:bodyPr rtlCol="0" anchor="ctr"/>
-          <a:lstStyle/>
-          <a:p>
-            <a:pPr algn="ctr"/>
-          </a:p>
-        </p:txBody>
-      </p:sp>
-      <p:sp>
-        <p:nvSpPr>
-          <p:cNvPr id="13" name="Oval 12"/>
-          <p:cNvSpPr/>
-          <p:nvPr/>
-        </p:nvSpPr>
-        <p:spPr>
-          <a:xfrm>
-            <a:off x="621792" y="4732020"/>
-            <a:ext cx="310896" cy="310896"/>
-          </a:xfrm>
-          <a:prstGeom prst="ellipse">
-            <a:avLst/>
-          </a:prstGeom>
-          <a:solidFill>
-            <a:srgbClr val="009CD6"/>
-          </a:solidFill>
-          <a:ln>
-            <a:noFill/>
-          </a:ln>
-          <a:effectLst/>
-        </p:spPr>
-        <p:style>
-          <a:lnRef idx="1">
-            <a:schemeClr val="accent1"/>
-          </a:lnRef>
-          <a:fillRef idx="3">
-            <a:schemeClr val="accent1"/>
-          </a:fillRef>
-          <a:effectRef idx="2">
-            <a:schemeClr val="accent1"/>
-          </a:effectRef>
-          <a:fontRef idx="minor">
-            <a:schemeClr val="lt1"/>
-          </a:fontRef>
-        </p:style>
-        <p:txBody>
-          <a:bodyPr rtlCol="0" anchor="ctr" lIns="0" rIns="0" tIns="0" bIns="0" wrap="square"/>
-          <a:lstStyle/>
-          <a:p>
-            <a:pPr algn="ctr"/>
-            <a:r>
-              <a:rPr sz="1300" b="1" i="0">
-                <a:solidFill>
-                  <a:srgbClr val="FFFFFF"/>
-                </a:solidFill>
-                <a:latin typeface="Arial"/>
-              </a:rPr>
-              <a:t>4</a:t>
-            </a:r>
-          </a:p>
-        </p:txBody>
-      </p:sp>
-      <p:sp>
-        <p:nvSpPr>
-          <p:cNvPr id="14" name="TextBox 13"/>
-          <p:cNvSpPr txBox="1"/>
-          <p:nvPr/>
-        </p:nvSpPr>
-        <p:spPr>
-          <a:xfrm>
-            <a:off x="1115568" y="4686300"/>
-            <a:ext cx="10527487" cy="1028699"/>
-          </a:xfrm>
-          <a:prstGeom prst="rect">
-            <a:avLst/>
-          </a:prstGeom>
-          <a:noFill/>
-        </p:spPr>
-        <p:txBody>
-          <a:bodyPr wrap="square">
-            <a:spAutoFit/>
-          </a:bodyPr>
-          <a:lstStyle/>
-          <a:p>
-            <a:pPr>
-              <a:spcAft>
-                <a:spcPts val="300"/>
-              </a:spcAft>
-            </a:pPr>
-            <a:r>
-              <a:rPr sz="1900" b="1" i="0">
-                <a:solidFill>
-                  <a:srgbClr val="1A1A1A"/>
-                </a:solidFill>
-                <a:latin typeface="Arial"/>
-              </a:rPr>
-              <a:t>The Board makes a decision</a:t>
-            </a:r>
-          </a:p>
-          <a:p>
-            <a:pPr>
-              <a:spcAft>
-                <a:spcPts val="300"/>
-              </a:spcAft>
-            </a:pPr>
-            <a:r>
-              <a:rPr sz="1550" b="0" i="0">
-                <a:solidFill>
-                  <a:srgbClr val="595959"/>
-                </a:solidFill>
-                <a:latin typeface="Arial"/>
-              </a:rPr>
-              <a:t>Record it, with its reason.</a:t>
-            </a:r>
-          </a:p>
-        </p:txBody>
-      </p:sp>
-      <p:sp>
-        <p:nvSpPr>
-          <p:cNvPr id="15" name="TextBox 14"/>
-          <p:cNvSpPr txBox="1"/>
-          <p:nvPr/>
-        </p:nvSpPr>
-        <p:spPr>
-          <a:xfrm>
-            <a:off x="658368" y="5870448"/>
-            <a:ext cx="10881360" cy="548640"/>
-          </a:xfrm>
-          <a:prstGeom prst="rect">
-            <a:avLst/>
-          </a:prstGeom>
-          <a:noFill/>
-        </p:spPr>
-        <p:txBody>
-          <a:bodyPr wrap="square">
-            <a:spAutoFit/>
-          </a:bodyPr>
-          <a:lstStyle/>
-          <a:p>
-            <a:r>
-              <a:rPr sz="1550" b="1" i="0">
-                <a:solidFill>
-                  <a:srgbClr val="006E96"/>
-                </a:solidFill>
-                <a:latin typeface="Arial"/>
-              </a:rPr>
-              <a:t>Events drive updates, not the calendar.</a:t>
-            </a:r>
-          </a:p>
-        </p:txBody>
-      </p:sp>
-      <p:sp>
-        <p:nvSpPr>
-          <p:cNvPr id="16" name="TextBox 15"/>
+              <a:t>Keeping it true is unglamorous and constant.</a:t>
+            </a:r>
+          </a:p>
+        </p:txBody>
+      </p:sp>
+      <p:sp>
+        <p:nvSpPr>
+          <p:cNvPr id="5" name="TextBox 4"/>
           <p:cNvSpPr txBox="1"/>
           <p:nvPr/>
         </p:nvSpPr>
@@ -13746,6 +12028,41 @@
                 <a:latin typeface="Arial"/>
               </a:rPr>
               <a:t>3.3 · Keep the repository true — the update discipline</a:t>
+            </a:r>
+          </a:p>
+        </p:txBody>
+      </p:sp>
+      <p:sp>
+        <p:nvSpPr>
+          <p:cNvPr id="6" name="TextBox 5"/>
+          <p:cNvSpPr txBox="1"/>
+          <p:nvPr/>
+        </p:nvSpPr>
+        <p:spPr>
+          <a:xfrm>
+            <a:off x="10058400" y="6473952"/>
+            <a:ext cx="1673352" cy="292608"/>
+          </a:xfrm>
+          <a:prstGeom prst="rect">
+            <a:avLst/>
+          </a:prstGeom>
+          <a:noFill/>
+        </p:spPr>
+        <p:txBody>
+          <a:bodyPr wrap="square">
+            <a:spAutoFit/>
+          </a:bodyPr>
+          <a:lstStyle/>
+          <a:p>
+            <a:pPr algn="r"/>
+            <a:r>
+              <a:rPr sz="900" b="0" i="0">
+                <a:solidFill>
+                  <a:srgbClr val="595959"/>
+                </a:solidFill>
+                <a:latin typeface="Arial"/>
+              </a:rPr>
+              <a:t>www.itu.int</a:t>
             </a:r>
           </a:p>
         </p:txBody>
@@ -13841,27 +12158,68 @@
                 </a:solidFill>
                 <a:latin typeface="Arial"/>
               </a:rPr>
-              <a:t>A light gate keeps the repository conformant as it grows</a:t>
-            </a:r>
-          </a:p>
-        </p:txBody>
-      </p:sp>
-      <p:sp>
-        <p:nvSpPr>
-          <p:cNvPr id="4" name="Oval 3"/>
+              <a:t>A missing architecture makes people ask questions; a wrong one answers them</a:t>
+            </a:r>
+          </a:p>
+        </p:txBody>
+      </p:sp>
+      <p:sp>
+        <p:nvSpPr>
+          <p:cNvPr id="4" name="TextBox 3"/>
+          <p:cNvSpPr txBox="1"/>
+          <p:nvPr/>
+        </p:nvSpPr>
+        <p:spPr>
+          <a:xfrm>
+            <a:off x="658368" y="1600200"/>
+            <a:ext cx="10881360" cy="2651760"/>
+          </a:xfrm>
+          <a:prstGeom prst="rect">
+            <a:avLst/>
+          </a:prstGeom>
+          <a:noFill/>
+        </p:spPr>
+        <p:txBody>
+          <a:bodyPr wrap="square">
+            <a:spAutoFit/>
+          </a:bodyPr>
+          <a:lstStyle/>
+          <a:p>
+            <a:pPr>
+              <a:spcAft>
+                <a:spcPts val="1200"/>
+              </a:spcAft>
+            </a:pPr>
+            <a:r>
+              <a:rPr sz="2000" b="0" i="0">
+                <a:solidFill>
+                  <a:srgbClr val="1A1A1A"/>
+                </a:solidFill>
+                <a:latin typeface="Arial"/>
+              </a:rPr>
+              <a:t>If the repository says the Examination Authority consumes the Learner Registry, and in reality it quietly built its own copy last quarter, then every decision made on the repository is built on a falsehood.</a:t>
+            </a:r>
+          </a:p>
+        </p:txBody>
+      </p:sp>
+      <p:sp>
+        <p:nvSpPr>
+          <p:cNvPr id="5" name="Rounded Rectangle 4"/>
           <p:cNvSpPr/>
           <p:nvPr/>
         </p:nvSpPr>
         <p:spPr>
           <a:xfrm>
-            <a:off x="621792" y="1508760"/>
-            <a:ext cx="310896" cy="310896"/>
-          </a:xfrm>
-          <a:prstGeom prst="ellipse">
-            <a:avLst/>
+            <a:off x="658368" y="4434840"/>
+            <a:ext cx="10881360" cy="1325880"/>
+          </a:xfrm>
+          <a:prstGeom prst="roundRect">
+            <a:avLst>
+              <a:gd name="adj" fmla="val 4500"/>
+            </a:avLst>
           </a:prstGeom>
           <a:solidFill>
-            <a:srgbClr val="009CD6"/>
+            <a:srgbClr val="E5F5FB"/>
           </a:solidFill>
           <a:ln>
             <a:noFill/>
@@ -13883,32 +12241,23 @@
           </a:fontRef>
         </p:style>
         <p:txBody>
-          <a:bodyPr rtlCol="0" anchor="ctr" lIns="0" rIns="0" tIns="0" bIns="0" wrap="square"/>
+          <a:bodyPr rtlCol="0" anchor="ctr"/>
           <a:lstStyle/>
           <a:p>
             <a:pPr algn="ctr"/>
-            <a:r>
-              <a:rPr sz="1300" b="1" i="0">
-                <a:solidFill>
-                  <a:srgbClr val="FFFFFF"/>
-                </a:solidFill>
-                <a:latin typeface="Arial"/>
-              </a:rPr>
-              <a:t>1</a:t>
-            </a:r>
-          </a:p>
-        </p:txBody>
-      </p:sp>
-      <p:sp>
-        <p:nvSpPr>
-          <p:cNvPr id="5" name="TextBox 4"/>
+          </a:p>
+        </p:txBody>
+      </p:sp>
+      <p:sp>
+        <p:nvSpPr>
+          <p:cNvPr id="6" name="TextBox 5"/>
           <p:cNvSpPr txBox="1"/>
           <p:nvPr/>
         </p:nvSpPr>
         <p:spPr>
           <a:xfrm>
-            <a:off x="1115568" y="1463040"/>
-            <a:ext cx="10527487" cy="1386839"/>
+            <a:off x="859536" y="4626864"/>
+            <a:ext cx="10479024" cy="1051560"/>
           </a:xfrm>
           <a:prstGeom prst="rect">
             <a:avLst/>
@@ -13923,330 +12272,24 @@
           <a:p>
             <a:pPr>
               <a:spcAft>
-                <a:spcPts val="300"/>
+                <a:spcPts val="700"/>
               </a:spcAft>
             </a:pPr>
             <a:r>
-              <a:rPr sz="1900" b="1" i="0">
-                <a:solidFill>
-                  <a:srgbClr val="1A1A1A"/>
-                </a:solidFill>
-                <a:latin typeface="Arial"/>
-              </a:rPr>
-              <a:t>Does the update use the shared entities correctly?</a:t>
-            </a:r>
-          </a:p>
-        </p:txBody>
-      </p:sp>
-      <p:sp>
-        <p:nvSpPr>
-          <p:cNvPr id="6" name="Rectangle 5"/>
-          <p:cNvSpPr/>
-          <p:nvPr/>
-        </p:nvSpPr>
-        <p:spPr>
-          <a:xfrm>
-            <a:off x="621792" y="2854452"/>
-            <a:ext cx="10881360" cy="12700"/>
-          </a:xfrm>
-          <a:prstGeom prst="rect">
-            <a:avLst/>
-          </a:prstGeom>
-          <a:solidFill>
-            <a:srgbClr val="DDECF4"/>
-          </a:solidFill>
-          <a:ln>
-            <a:noFill/>
-          </a:ln>
-          <a:effectLst/>
-        </p:spPr>
-        <p:style>
-          <a:lnRef idx="1">
-            <a:schemeClr val="accent1"/>
-          </a:lnRef>
-          <a:fillRef idx="3">
-            <a:schemeClr val="accent1"/>
-          </a:fillRef>
-          <a:effectRef idx="2">
-            <a:schemeClr val="accent1"/>
-          </a:effectRef>
-          <a:fontRef idx="minor">
-            <a:schemeClr val="lt1"/>
-          </a:fontRef>
-        </p:style>
-        <p:txBody>
-          <a:bodyPr rtlCol="0" anchor="ctr"/>
-          <a:lstStyle/>
-          <a:p>
-            <a:pPr algn="ctr"/>
-          </a:p>
-        </p:txBody>
-      </p:sp>
-      <p:sp>
-        <p:nvSpPr>
-          <p:cNvPr id="7" name="Oval 6"/>
-          <p:cNvSpPr/>
-          <p:nvPr/>
-        </p:nvSpPr>
-        <p:spPr>
-          <a:xfrm>
-            <a:off x="621792" y="2941319"/>
-            <a:ext cx="310896" cy="310896"/>
-          </a:xfrm>
-          <a:prstGeom prst="ellipse">
-            <a:avLst/>
-          </a:prstGeom>
-          <a:solidFill>
-            <a:srgbClr val="009CD6"/>
-          </a:solidFill>
-          <a:ln>
-            <a:noFill/>
-          </a:ln>
-          <a:effectLst/>
-        </p:spPr>
-        <p:style>
-          <a:lnRef idx="1">
-            <a:schemeClr val="accent1"/>
-          </a:lnRef>
-          <a:fillRef idx="3">
-            <a:schemeClr val="accent1"/>
-          </a:fillRef>
-          <a:effectRef idx="2">
-            <a:schemeClr val="accent1"/>
-          </a:effectRef>
-          <a:fontRef idx="minor">
-            <a:schemeClr val="lt1"/>
-          </a:fontRef>
-        </p:style>
-        <p:txBody>
-          <a:bodyPr rtlCol="0" anchor="ctr" lIns="0" rIns="0" tIns="0" bIns="0" wrap="square"/>
-          <a:lstStyle/>
-          <a:p>
-            <a:pPr algn="ctr"/>
-            <a:r>
-              <a:rPr sz="1300" b="1" i="0">
-                <a:solidFill>
-                  <a:srgbClr val="FFFFFF"/>
-                </a:solidFill>
-                <a:latin typeface="Arial"/>
-              </a:rPr>
-              <a:t>2</a:t>
-            </a:r>
-          </a:p>
-        </p:txBody>
-      </p:sp>
-      <p:sp>
-        <p:nvSpPr>
-          <p:cNvPr id="8" name="TextBox 7"/>
-          <p:cNvSpPr txBox="1"/>
-          <p:nvPr/>
-        </p:nvSpPr>
-        <p:spPr>
-          <a:xfrm>
-            <a:off x="1115568" y="2895600"/>
-            <a:ext cx="10527487" cy="1386839"/>
-          </a:xfrm>
-          <a:prstGeom prst="rect">
-            <a:avLst/>
-          </a:prstGeom>
-          <a:noFill/>
-        </p:spPr>
-        <p:txBody>
-          <a:bodyPr wrap="square">
-            <a:spAutoFit/>
-          </a:bodyPr>
-          <a:lstStyle/>
-          <a:p>
-            <a:pPr>
-              <a:spcAft>
-                <a:spcPts val="300"/>
-              </a:spcAft>
-            </a:pPr>
-            <a:r>
-              <a:rPr sz="1900" b="1" i="0">
-                <a:solidFill>
-                  <a:srgbClr val="1A1A1A"/>
-                </a:solidFill>
-                <a:latin typeface="Arial"/>
-              </a:rPr>
-              <a:t>Does every data domain still have exactly one owner?</a:t>
-            </a:r>
-          </a:p>
-        </p:txBody>
-      </p:sp>
-      <p:sp>
-        <p:nvSpPr>
-          <p:cNvPr id="9" name="Rectangle 8"/>
-          <p:cNvSpPr/>
-          <p:nvPr/>
-        </p:nvSpPr>
-        <p:spPr>
-          <a:xfrm>
-            <a:off x="621792" y="4287011"/>
-            <a:ext cx="10881360" cy="12700"/>
-          </a:xfrm>
-          <a:prstGeom prst="rect">
-            <a:avLst/>
-          </a:prstGeom>
-          <a:solidFill>
-            <a:srgbClr val="DDECF4"/>
-          </a:solidFill>
-          <a:ln>
-            <a:noFill/>
-          </a:ln>
-          <a:effectLst/>
-        </p:spPr>
-        <p:style>
-          <a:lnRef idx="1">
-            <a:schemeClr val="accent1"/>
-          </a:lnRef>
-          <a:fillRef idx="3">
-            <a:schemeClr val="accent1"/>
-          </a:fillRef>
-          <a:effectRef idx="2">
-            <a:schemeClr val="accent1"/>
-          </a:effectRef>
-          <a:fontRef idx="minor">
-            <a:schemeClr val="lt1"/>
-          </a:fontRef>
-        </p:style>
-        <p:txBody>
-          <a:bodyPr rtlCol="0" anchor="ctr"/>
-          <a:lstStyle/>
-          <a:p>
-            <a:pPr algn="ctr"/>
-          </a:p>
-        </p:txBody>
-      </p:sp>
-      <p:sp>
-        <p:nvSpPr>
-          <p:cNvPr id="10" name="Oval 9"/>
-          <p:cNvSpPr/>
-          <p:nvPr/>
-        </p:nvSpPr>
-        <p:spPr>
-          <a:xfrm>
-            <a:off x="621792" y="4373879"/>
-            <a:ext cx="310896" cy="310896"/>
-          </a:xfrm>
-          <a:prstGeom prst="ellipse">
-            <a:avLst/>
-          </a:prstGeom>
-          <a:solidFill>
-            <a:srgbClr val="009CD6"/>
-          </a:solidFill>
-          <a:ln>
-            <a:noFill/>
-          </a:ln>
-          <a:effectLst/>
-        </p:spPr>
-        <p:style>
-          <a:lnRef idx="1">
-            <a:schemeClr val="accent1"/>
-          </a:lnRef>
-          <a:fillRef idx="3">
-            <a:schemeClr val="accent1"/>
-          </a:fillRef>
-          <a:effectRef idx="2">
-            <a:schemeClr val="accent1"/>
-          </a:effectRef>
-          <a:fontRef idx="minor">
-            <a:schemeClr val="lt1"/>
-          </a:fontRef>
-        </p:style>
-        <p:txBody>
-          <a:bodyPr rtlCol="0" anchor="ctr" lIns="0" rIns="0" tIns="0" bIns="0" wrap="square"/>
-          <a:lstStyle/>
-          <a:p>
-            <a:pPr algn="ctr"/>
-            <a:r>
-              <a:rPr sz="1300" b="1" i="0">
-                <a:solidFill>
-                  <a:srgbClr val="FFFFFF"/>
-                </a:solidFill>
-                <a:latin typeface="Arial"/>
-              </a:rPr>
-              <a:t>3</a:t>
-            </a:r>
-          </a:p>
-        </p:txBody>
-      </p:sp>
-      <p:sp>
-        <p:nvSpPr>
-          <p:cNvPr id="11" name="TextBox 10"/>
-          <p:cNvSpPr txBox="1"/>
-          <p:nvPr/>
-        </p:nvSpPr>
-        <p:spPr>
-          <a:xfrm>
-            <a:off x="1115568" y="4328159"/>
-            <a:ext cx="10527487" cy="1386839"/>
-          </a:xfrm>
-          <a:prstGeom prst="rect">
-            <a:avLst/>
-          </a:prstGeom>
-          <a:noFill/>
-        </p:spPr>
-        <p:txBody>
-          <a:bodyPr wrap="square">
-            <a:spAutoFit/>
-          </a:bodyPr>
-          <a:lstStyle/>
-          <a:p>
-            <a:pPr>
-              <a:spcAft>
-                <a:spcPts val="300"/>
-              </a:spcAft>
-            </a:pPr>
-            <a:r>
-              <a:rPr sz="1900" b="1" i="0">
-                <a:solidFill>
-                  <a:srgbClr val="1A1A1A"/>
-                </a:solidFill>
-                <a:latin typeface="Arial"/>
-              </a:rPr>
-              <a:t>Is every decision logged with its reason?</a:t>
-            </a:r>
-          </a:p>
-        </p:txBody>
-      </p:sp>
-      <p:sp>
-        <p:nvSpPr>
-          <p:cNvPr id="12" name="TextBox 11"/>
-          <p:cNvSpPr txBox="1"/>
-          <p:nvPr/>
-        </p:nvSpPr>
-        <p:spPr>
-          <a:xfrm>
-            <a:off x="658368" y="5870448"/>
-            <a:ext cx="10881360" cy="548640"/>
-          </a:xfrm>
-          <a:prstGeom prst="rect">
-            <a:avLst/>
-          </a:prstGeom>
-          <a:noFill/>
-        </p:spPr>
-        <p:txBody>
-          <a:bodyPr wrap="square">
-            <a:spAutoFit/>
-          </a:bodyPr>
-          <a:lstStyle/>
-          <a:p>
-            <a:r>
-              <a:rPr sz="1550" b="1" i="0">
+              <a:rPr sz="2300" b="1" i="0">
                 <a:solidFill>
                   <a:srgbClr val="006E96"/>
                 </a:solidFill>
                 <a:latin typeface="Arial"/>
               </a:rPr>
-              <a:t>The check is small. Skipping it fills the repository with orphans and private language.</a:t>
-            </a:r>
-          </a:p>
-        </p:txBody>
-      </p:sp>
-      <p:sp>
-        <p:nvSpPr>
-          <p:cNvPr id="13" name="TextBox 12"/>
+              <a:t>Currency is not a nice-to-have. It is the whole value.</a:t>
+            </a:r>
+          </a:p>
+        </p:txBody>
+      </p:sp>
+      <p:sp>
+        <p:nvSpPr>
+          <p:cNvPr id="7" name="TextBox 6"/>
           <p:cNvSpPr txBox="1"/>
           <p:nvPr/>
         </p:nvSpPr>
@@ -14369,7 +12412,7 @@
                 </a:solidFill>
                 <a:latin typeface="Arial"/>
               </a:rPr>
-              <a:t>The cheapest moment to update the repository is when a project comes to the Board</a:t>
+              <a:t>When everyone owns currency, no one does</a:t>
             </a:r>
           </a:p>
         </p:txBody>
@@ -14408,7 +12451,7 @@
                 </a:solidFill>
                 <a:latin typeface="Arial"/>
               </a:rPr>
-              <a:t>The project tells you what it will build, what it will consume, and what data it touches. That is exactly the information the repository needs.</a:t>
+              <a:t>One person — usually the chief architect, or a named custodian on the EA team — is accountable for the repository being current. Not a committee. Not everyone.</a:t>
             </a:r>
           </a:p>
           <a:p>
@@ -14424,7 +12467,7 @@
                 </a:solidFill>
                 <a:latin typeface="Arial"/>
               </a:rPr>
-              <a:t>So tie the two together: a project that passes the gate leaves its architecture change in the repository as it goes.</a:t>
+              <a:t>That person does not do all the updating. They are answerable for whether the picture is true.</a:t>
             </a:r>
           </a:p>
         </p:txBody>
@@ -14509,7 +12552,7 @@
                 </a:solidFill>
                 <a:latin typeface="Arial"/>
               </a:rPr>
-              <a:t>The governance process and the update discipline are one motion, done once.</a:t>
+              <a:t>One name, one accountability.</a:t>
             </a:r>
           </a:p>
         </p:txBody>
@@ -14568,6 +12611,1532 @@
       <p:grpSpPr/>
       <p:sp>
         <p:nvSpPr>
+          <p:cNvPr id="2" name="Rectangle 1"/>
+          <p:cNvSpPr/>
+          <p:nvPr/>
+        </p:nvSpPr>
+        <p:spPr>
+          <a:xfrm>
+            <a:off x="457200" y="384048"/>
+            <a:ext cx="45720" cy="256032"/>
+          </a:xfrm>
+          <a:prstGeom prst="rect">
+            <a:avLst/>
+          </a:prstGeom>
+          <a:solidFill>
+            <a:srgbClr val="009CD6"/>
+          </a:solidFill>
+          <a:ln>
+            <a:noFill/>
+          </a:ln>
+          <a:effectLst/>
+        </p:spPr>
+        <p:style>
+          <a:lnRef idx="1">
+            <a:schemeClr val="accent1"/>
+          </a:lnRef>
+          <a:fillRef idx="3">
+            <a:schemeClr val="accent1"/>
+          </a:fillRef>
+          <a:effectRef idx="2">
+            <a:schemeClr val="accent1"/>
+          </a:effectRef>
+          <a:fontRef idx="minor">
+            <a:schemeClr val="lt1"/>
+          </a:fontRef>
+        </p:style>
+        <p:txBody>
+          <a:bodyPr rtlCol="0" anchor="ctr"/>
+          <a:lstStyle/>
+          <a:p>
+            <a:pPr algn="ctr"/>
+          </a:p>
+        </p:txBody>
+      </p:sp>
+      <p:sp>
+        <p:nvSpPr>
+          <p:cNvPr id="3" name="TextBox 2"/>
+          <p:cNvSpPr txBox="1"/>
+          <p:nvPr/>
+        </p:nvSpPr>
+        <p:spPr>
+          <a:xfrm>
+            <a:off x="621792" y="274320"/>
+            <a:ext cx="11247120" cy="914400"/>
+          </a:xfrm>
+          <a:prstGeom prst="rect">
+            <a:avLst/>
+          </a:prstGeom>
+          <a:noFill/>
+        </p:spPr>
+        <p:txBody>
+          <a:bodyPr wrap="square">
+            <a:spAutoFit/>
+          </a:bodyPr>
+          <a:lstStyle/>
+          <a:p>
+            <a:r>
+              <a:rPr sz="2800" b="1" i="0">
+                <a:solidFill>
+                  <a:srgbClr val="1A1A1A"/>
+                </a:solidFill>
+                <a:latin typeface="Arial"/>
+              </a:rPr>
+              <a:t>Tie updates to events, because a yearly review is eleven months stale</a:t>
+            </a:r>
+          </a:p>
+        </p:txBody>
+      </p:sp>
+      <p:sp>
+        <p:nvSpPr>
+          <p:cNvPr id="4" name="Oval 3"/>
+          <p:cNvSpPr/>
+          <p:nvPr/>
+        </p:nvSpPr>
+        <p:spPr>
+          <a:xfrm>
+            <a:off x="621792" y="1508760"/>
+            <a:ext cx="310896" cy="310896"/>
+          </a:xfrm>
+          <a:prstGeom prst="ellipse">
+            <a:avLst/>
+          </a:prstGeom>
+          <a:solidFill>
+            <a:srgbClr val="009CD6"/>
+          </a:solidFill>
+          <a:ln>
+            <a:noFill/>
+          </a:ln>
+          <a:effectLst/>
+        </p:spPr>
+        <p:style>
+          <a:lnRef idx="1">
+            <a:schemeClr val="accent1"/>
+          </a:lnRef>
+          <a:fillRef idx="3">
+            <a:schemeClr val="accent1"/>
+          </a:fillRef>
+          <a:effectRef idx="2">
+            <a:schemeClr val="accent1"/>
+          </a:effectRef>
+          <a:fontRef idx="minor">
+            <a:schemeClr val="lt1"/>
+          </a:fontRef>
+        </p:style>
+        <p:txBody>
+          <a:bodyPr rtlCol="0" anchor="ctr" lIns="0" rIns="0" tIns="0" bIns="0" wrap="square"/>
+          <a:lstStyle/>
+          <a:p>
+            <a:pPr algn="ctr"/>
+            <a:r>
+              <a:rPr sz="1300" b="1" i="0">
+                <a:solidFill>
+                  <a:srgbClr val="FFFFFF"/>
+                </a:solidFill>
+                <a:latin typeface="Arial"/>
+              </a:rPr>
+              <a:t>1</a:t>
+            </a:r>
+          </a:p>
+        </p:txBody>
+      </p:sp>
+      <p:sp>
+        <p:nvSpPr>
+          <p:cNvPr id="5" name="TextBox 4"/>
+          <p:cNvSpPr txBox="1"/>
+          <p:nvPr/>
+        </p:nvSpPr>
+        <p:spPr>
+          <a:xfrm>
+            <a:off x="1115568" y="1463040"/>
+            <a:ext cx="10527487" cy="1028699"/>
+          </a:xfrm>
+          <a:prstGeom prst="rect">
+            <a:avLst/>
+          </a:prstGeom>
+          <a:noFill/>
+        </p:spPr>
+        <p:txBody>
+          <a:bodyPr wrap="square">
+            <a:spAutoFit/>
+          </a:bodyPr>
+          <a:lstStyle/>
+          <a:p>
+            <a:pPr>
+              <a:spcAft>
+                <a:spcPts val="300"/>
+              </a:spcAft>
+            </a:pPr>
+            <a:r>
+              <a:rPr sz="1900" b="1" i="0">
+                <a:solidFill>
+                  <a:srgbClr val="1A1A1A"/>
+                </a:solidFill>
+                <a:latin typeface="Arial"/>
+              </a:rPr>
+              <a:t>A system goes live</a:t>
+            </a:r>
+          </a:p>
+          <a:p>
+            <a:pPr>
+              <a:spcAft>
+                <a:spcPts val="300"/>
+              </a:spcAft>
+            </a:pPr>
+            <a:r>
+              <a:rPr sz="1550" b="0" i="0">
+                <a:solidFill>
+                  <a:srgbClr val="595959"/>
+                </a:solidFill>
+                <a:latin typeface="Arial"/>
+              </a:rPr>
+              <a:t>Update the application layer.</a:t>
+            </a:r>
+          </a:p>
+        </p:txBody>
+      </p:sp>
+      <p:sp>
+        <p:nvSpPr>
+          <p:cNvPr id="6" name="Rectangle 5"/>
+          <p:cNvSpPr/>
+          <p:nvPr/>
+        </p:nvSpPr>
+        <p:spPr>
+          <a:xfrm>
+            <a:off x="621792" y="2496312"/>
+            <a:ext cx="10881360" cy="12700"/>
+          </a:xfrm>
+          <a:prstGeom prst="rect">
+            <a:avLst/>
+          </a:prstGeom>
+          <a:solidFill>
+            <a:srgbClr val="DDECF4"/>
+          </a:solidFill>
+          <a:ln>
+            <a:noFill/>
+          </a:ln>
+          <a:effectLst/>
+        </p:spPr>
+        <p:style>
+          <a:lnRef idx="1">
+            <a:schemeClr val="accent1"/>
+          </a:lnRef>
+          <a:fillRef idx="3">
+            <a:schemeClr val="accent1"/>
+          </a:fillRef>
+          <a:effectRef idx="2">
+            <a:schemeClr val="accent1"/>
+          </a:effectRef>
+          <a:fontRef idx="minor">
+            <a:schemeClr val="lt1"/>
+          </a:fontRef>
+        </p:style>
+        <p:txBody>
+          <a:bodyPr rtlCol="0" anchor="ctr"/>
+          <a:lstStyle/>
+          <a:p>
+            <a:pPr algn="ctr"/>
+          </a:p>
+        </p:txBody>
+      </p:sp>
+      <p:sp>
+        <p:nvSpPr>
+          <p:cNvPr id="7" name="Oval 6"/>
+          <p:cNvSpPr/>
+          <p:nvPr/>
+        </p:nvSpPr>
+        <p:spPr>
+          <a:xfrm>
+            <a:off x="621792" y="2583179"/>
+            <a:ext cx="310896" cy="310896"/>
+          </a:xfrm>
+          <a:prstGeom prst="ellipse">
+            <a:avLst/>
+          </a:prstGeom>
+          <a:solidFill>
+            <a:srgbClr val="009CD6"/>
+          </a:solidFill>
+          <a:ln>
+            <a:noFill/>
+          </a:ln>
+          <a:effectLst/>
+        </p:spPr>
+        <p:style>
+          <a:lnRef idx="1">
+            <a:schemeClr val="accent1"/>
+          </a:lnRef>
+          <a:fillRef idx="3">
+            <a:schemeClr val="accent1"/>
+          </a:fillRef>
+          <a:effectRef idx="2">
+            <a:schemeClr val="accent1"/>
+          </a:effectRef>
+          <a:fontRef idx="minor">
+            <a:schemeClr val="lt1"/>
+          </a:fontRef>
+        </p:style>
+        <p:txBody>
+          <a:bodyPr rtlCol="0" anchor="ctr" lIns="0" rIns="0" tIns="0" bIns="0" wrap="square"/>
+          <a:lstStyle/>
+          <a:p>
+            <a:pPr algn="ctr"/>
+            <a:r>
+              <a:rPr sz="1300" b="1" i="0">
+                <a:solidFill>
+                  <a:srgbClr val="FFFFFF"/>
+                </a:solidFill>
+                <a:latin typeface="Arial"/>
+              </a:rPr>
+              <a:t>2</a:t>
+            </a:r>
+          </a:p>
+        </p:txBody>
+      </p:sp>
+      <p:sp>
+        <p:nvSpPr>
+          <p:cNvPr id="8" name="TextBox 7"/>
+          <p:cNvSpPr txBox="1"/>
+          <p:nvPr/>
+        </p:nvSpPr>
+        <p:spPr>
+          <a:xfrm>
+            <a:off x="1115568" y="2537460"/>
+            <a:ext cx="10527487" cy="1028699"/>
+          </a:xfrm>
+          <a:prstGeom prst="rect">
+            <a:avLst/>
+          </a:prstGeom>
+          <a:noFill/>
+        </p:spPr>
+        <p:txBody>
+          <a:bodyPr wrap="square">
+            <a:spAutoFit/>
+          </a:bodyPr>
+          <a:lstStyle/>
+          <a:p>
+            <a:pPr>
+              <a:spcAft>
+                <a:spcPts val="300"/>
+              </a:spcAft>
+            </a:pPr>
+            <a:r>
+              <a:rPr sz="1900" b="1" i="0">
+                <a:solidFill>
+                  <a:srgbClr val="1A1A1A"/>
+                </a:solidFill>
+                <a:latin typeface="Arial"/>
+              </a:rPr>
+              <a:t>A system is retired</a:t>
+            </a:r>
+          </a:p>
+          <a:p>
+            <a:pPr>
+              <a:spcAft>
+                <a:spcPts val="300"/>
+              </a:spcAft>
+            </a:pPr>
+            <a:r>
+              <a:rPr sz="1550" b="0" i="0">
+                <a:solidFill>
+                  <a:srgbClr val="595959"/>
+                </a:solidFill>
+                <a:latin typeface="Arial"/>
+              </a:rPr>
+              <a:t>Remove it.</a:t>
+            </a:r>
+          </a:p>
+        </p:txBody>
+      </p:sp>
+      <p:sp>
+        <p:nvSpPr>
+          <p:cNvPr id="9" name="Rectangle 8"/>
+          <p:cNvSpPr/>
+          <p:nvPr/>
+        </p:nvSpPr>
+        <p:spPr>
+          <a:xfrm>
+            <a:off x="621792" y="3570732"/>
+            <a:ext cx="10881360" cy="12700"/>
+          </a:xfrm>
+          <a:prstGeom prst="rect">
+            <a:avLst/>
+          </a:prstGeom>
+          <a:solidFill>
+            <a:srgbClr val="DDECF4"/>
+          </a:solidFill>
+          <a:ln>
+            <a:noFill/>
+          </a:ln>
+          <a:effectLst/>
+        </p:spPr>
+        <p:style>
+          <a:lnRef idx="1">
+            <a:schemeClr val="accent1"/>
+          </a:lnRef>
+          <a:fillRef idx="3">
+            <a:schemeClr val="accent1"/>
+          </a:fillRef>
+          <a:effectRef idx="2">
+            <a:schemeClr val="accent1"/>
+          </a:effectRef>
+          <a:fontRef idx="minor">
+            <a:schemeClr val="lt1"/>
+          </a:fontRef>
+        </p:style>
+        <p:txBody>
+          <a:bodyPr rtlCol="0" anchor="ctr"/>
+          <a:lstStyle/>
+          <a:p>
+            <a:pPr algn="ctr"/>
+          </a:p>
+        </p:txBody>
+      </p:sp>
+      <p:sp>
+        <p:nvSpPr>
+          <p:cNvPr id="10" name="Oval 9"/>
+          <p:cNvSpPr/>
+          <p:nvPr/>
+        </p:nvSpPr>
+        <p:spPr>
+          <a:xfrm>
+            <a:off x="621792" y="3657599"/>
+            <a:ext cx="310896" cy="310896"/>
+          </a:xfrm>
+          <a:prstGeom prst="ellipse">
+            <a:avLst/>
+          </a:prstGeom>
+          <a:solidFill>
+            <a:srgbClr val="009CD6"/>
+          </a:solidFill>
+          <a:ln>
+            <a:noFill/>
+          </a:ln>
+          <a:effectLst/>
+        </p:spPr>
+        <p:style>
+          <a:lnRef idx="1">
+            <a:schemeClr val="accent1"/>
+          </a:lnRef>
+          <a:fillRef idx="3">
+            <a:schemeClr val="accent1"/>
+          </a:fillRef>
+          <a:effectRef idx="2">
+            <a:schemeClr val="accent1"/>
+          </a:effectRef>
+          <a:fontRef idx="minor">
+            <a:schemeClr val="lt1"/>
+          </a:fontRef>
+        </p:style>
+        <p:txBody>
+          <a:bodyPr rtlCol="0" anchor="ctr" lIns="0" rIns="0" tIns="0" bIns="0" wrap="square"/>
+          <a:lstStyle/>
+          <a:p>
+            <a:pPr algn="ctr"/>
+            <a:r>
+              <a:rPr sz="1300" b="1" i="0">
+                <a:solidFill>
+                  <a:srgbClr val="FFFFFF"/>
+                </a:solidFill>
+                <a:latin typeface="Arial"/>
+              </a:rPr>
+              <a:t>3</a:t>
+            </a:r>
+          </a:p>
+        </p:txBody>
+      </p:sp>
+      <p:sp>
+        <p:nvSpPr>
+          <p:cNvPr id="11" name="TextBox 10"/>
+          <p:cNvSpPr txBox="1"/>
+          <p:nvPr/>
+        </p:nvSpPr>
+        <p:spPr>
+          <a:xfrm>
+            <a:off x="1115568" y="3611879"/>
+            <a:ext cx="10527487" cy="1028699"/>
+          </a:xfrm>
+          <a:prstGeom prst="rect">
+            <a:avLst/>
+          </a:prstGeom>
+          <a:noFill/>
+        </p:spPr>
+        <p:txBody>
+          <a:bodyPr wrap="square">
+            <a:spAutoFit/>
+          </a:bodyPr>
+          <a:lstStyle/>
+          <a:p>
+            <a:pPr>
+              <a:spcAft>
+                <a:spcPts val="300"/>
+              </a:spcAft>
+            </a:pPr>
+            <a:r>
+              <a:rPr sz="1900" b="1" i="0">
+                <a:solidFill>
+                  <a:srgbClr val="1A1A1A"/>
+                </a:solidFill>
+                <a:latin typeface="Arial"/>
+              </a:rPr>
+              <a:t>A new data domain appears</a:t>
+            </a:r>
+          </a:p>
+          <a:p>
+            <a:pPr>
+              <a:spcAft>
+                <a:spcPts val="300"/>
+              </a:spcAft>
+            </a:pPr>
+            <a:r>
+              <a:rPr sz="1550" b="0" i="0">
+                <a:solidFill>
+                  <a:srgbClr val="595959"/>
+                </a:solidFill>
+                <a:latin typeface="Arial"/>
+              </a:rPr>
+              <a:t>Add it, with its owner.</a:t>
+            </a:r>
+          </a:p>
+        </p:txBody>
+      </p:sp>
+      <p:sp>
+        <p:nvSpPr>
+          <p:cNvPr id="12" name="Rectangle 11"/>
+          <p:cNvSpPr/>
+          <p:nvPr/>
+        </p:nvSpPr>
+        <p:spPr>
+          <a:xfrm>
+            <a:off x="621792" y="4645152"/>
+            <a:ext cx="10881360" cy="12700"/>
+          </a:xfrm>
+          <a:prstGeom prst="rect">
+            <a:avLst/>
+          </a:prstGeom>
+          <a:solidFill>
+            <a:srgbClr val="DDECF4"/>
+          </a:solidFill>
+          <a:ln>
+            <a:noFill/>
+          </a:ln>
+          <a:effectLst/>
+        </p:spPr>
+        <p:style>
+          <a:lnRef idx="1">
+            <a:schemeClr val="accent1"/>
+          </a:lnRef>
+          <a:fillRef idx="3">
+            <a:schemeClr val="accent1"/>
+          </a:fillRef>
+          <a:effectRef idx="2">
+            <a:schemeClr val="accent1"/>
+          </a:effectRef>
+          <a:fontRef idx="minor">
+            <a:schemeClr val="lt1"/>
+          </a:fontRef>
+        </p:style>
+        <p:txBody>
+          <a:bodyPr rtlCol="0" anchor="ctr"/>
+          <a:lstStyle/>
+          <a:p>
+            <a:pPr algn="ctr"/>
+          </a:p>
+        </p:txBody>
+      </p:sp>
+      <p:sp>
+        <p:nvSpPr>
+          <p:cNvPr id="13" name="Oval 12"/>
+          <p:cNvSpPr/>
+          <p:nvPr/>
+        </p:nvSpPr>
+        <p:spPr>
+          <a:xfrm>
+            <a:off x="621792" y="4732020"/>
+            <a:ext cx="310896" cy="310896"/>
+          </a:xfrm>
+          <a:prstGeom prst="ellipse">
+            <a:avLst/>
+          </a:prstGeom>
+          <a:solidFill>
+            <a:srgbClr val="009CD6"/>
+          </a:solidFill>
+          <a:ln>
+            <a:noFill/>
+          </a:ln>
+          <a:effectLst/>
+        </p:spPr>
+        <p:style>
+          <a:lnRef idx="1">
+            <a:schemeClr val="accent1"/>
+          </a:lnRef>
+          <a:fillRef idx="3">
+            <a:schemeClr val="accent1"/>
+          </a:fillRef>
+          <a:effectRef idx="2">
+            <a:schemeClr val="accent1"/>
+          </a:effectRef>
+          <a:fontRef idx="minor">
+            <a:schemeClr val="lt1"/>
+          </a:fontRef>
+        </p:style>
+        <p:txBody>
+          <a:bodyPr rtlCol="0" anchor="ctr" lIns="0" rIns="0" tIns="0" bIns="0" wrap="square"/>
+          <a:lstStyle/>
+          <a:p>
+            <a:pPr algn="ctr"/>
+            <a:r>
+              <a:rPr sz="1300" b="1" i="0">
+                <a:solidFill>
+                  <a:srgbClr val="FFFFFF"/>
+                </a:solidFill>
+                <a:latin typeface="Arial"/>
+              </a:rPr>
+              <a:t>4</a:t>
+            </a:r>
+          </a:p>
+        </p:txBody>
+      </p:sp>
+      <p:sp>
+        <p:nvSpPr>
+          <p:cNvPr id="14" name="TextBox 13"/>
+          <p:cNvSpPr txBox="1"/>
+          <p:nvPr/>
+        </p:nvSpPr>
+        <p:spPr>
+          <a:xfrm>
+            <a:off x="1115568" y="4686300"/>
+            <a:ext cx="10527487" cy="1028699"/>
+          </a:xfrm>
+          <a:prstGeom prst="rect">
+            <a:avLst/>
+          </a:prstGeom>
+          <a:noFill/>
+        </p:spPr>
+        <p:txBody>
+          <a:bodyPr wrap="square">
+            <a:spAutoFit/>
+          </a:bodyPr>
+          <a:lstStyle/>
+          <a:p>
+            <a:pPr>
+              <a:spcAft>
+                <a:spcPts val="300"/>
+              </a:spcAft>
+            </a:pPr>
+            <a:r>
+              <a:rPr sz="1900" b="1" i="0">
+                <a:solidFill>
+                  <a:srgbClr val="1A1A1A"/>
+                </a:solidFill>
+                <a:latin typeface="Arial"/>
+              </a:rPr>
+              <a:t>The Board makes a decision</a:t>
+            </a:r>
+          </a:p>
+          <a:p>
+            <a:pPr>
+              <a:spcAft>
+                <a:spcPts val="300"/>
+              </a:spcAft>
+            </a:pPr>
+            <a:r>
+              <a:rPr sz="1550" b="0" i="0">
+                <a:solidFill>
+                  <a:srgbClr val="595959"/>
+                </a:solidFill>
+                <a:latin typeface="Arial"/>
+              </a:rPr>
+              <a:t>Record it, with its reason.</a:t>
+            </a:r>
+          </a:p>
+        </p:txBody>
+      </p:sp>
+      <p:sp>
+        <p:nvSpPr>
+          <p:cNvPr id="15" name="TextBox 14"/>
+          <p:cNvSpPr txBox="1"/>
+          <p:nvPr/>
+        </p:nvSpPr>
+        <p:spPr>
+          <a:xfrm>
+            <a:off x="658368" y="5870448"/>
+            <a:ext cx="10881360" cy="548640"/>
+          </a:xfrm>
+          <a:prstGeom prst="rect">
+            <a:avLst/>
+          </a:prstGeom>
+          <a:noFill/>
+        </p:spPr>
+        <p:txBody>
+          <a:bodyPr wrap="square">
+            <a:spAutoFit/>
+          </a:bodyPr>
+          <a:lstStyle/>
+          <a:p>
+            <a:r>
+              <a:rPr sz="1550" b="1" i="0">
+                <a:solidFill>
+                  <a:srgbClr val="006E96"/>
+                </a:solidFill>
+                <a:latin typeface="Arial"/>
+              </a:rPr>
+              <a:t>Events drive updates, not the calendar.</a:t>
+            </a:r>
+          </a:p>
+        </p:txBody>
+      </p:sp>
+      <p:sp>
+        <p:nvSpPr>
+          <p:cNvPr id="16" name="TextBox 15"/>
+          <p:cNvSpPr txBox="1"/>
+          <p:nvPr/>
+        </p:nvSpPr>
+        <p:spPr>
+          <a:xfrm>
+            <a:off x="457200" y="6473952"/>
+            <a:ext cx="7772400" cy="292608"/>
+          </a:xfrm>
+          <a:prstGeom prst="rect">
+            <a:avLst/>
+          </a:prstGeom>
+          <a:noFill/>
+        </p:spPr>
+        <p:txBody>
+          <a:bodyPr wrap="square">
+            <a:spAutoFit/>
+          </a:bodyPr>
+          <a:lstStyle/>
+          <a:p>
+            <a:r>
+              <a:rPr sz="900" b="0" i="0">
+                <a:solidFill>
+                  <a:srgbClr val="595959"/>
+                </a:solidFill>
+                <a:latin typeface="Arial"/>
+              </a:rPr>
+              <a:t>3.3 · Keep the repository true — the update discipline</a:t>
+            </a:r>
+          </a:p>
+        </p:txBody>
+      </p:sp>
+    </p:spTree>
+  </p:cSld>
+  <p:clrMapOvr>
+    <a:masterClrMapping/>
+  </p:clrMapOvr>
+</p:sld>
+</file>
+
+<file path=ppt/slides/slide25.xml><?xml version="1.0" encoding="utf-8"?>
+<p:sld xmlns:a="http://schemas.openxmlformats.org/drawingml/2006/main" xmlns:p="http://schemas.openxmlformats.org/presentationml/2006/main" xmlns:r="http://schemas.openxmlformats.org/officeDocument/2006/relationships">
+  <p:cSld>
+    <p:spTree>
+      <p:nvGrpSpPr>
+        <p:cNvPr id="1" name=""/>
+        <p:cNvGrpSpPr/>
+        <p:nvPr/>
+      </p:nvGrpSpPr>
+      <p:grpSpPr/>
+      <p:sp>
+        <p:nvSpPr>
+          <p:cNvPr id="2" name="Rectangle 1"/>
+          <p:cNvSpPr/>
+          <p:nvPr/>
+        </p:nvSpPr>
+        <p:spPr>
+          <a:xfrm>
+            <a:off x="457200" y="384048"/>
+            <a:ext cx="45720" cy="256032"/>
+          </a:xfrm>
+          <a:prstGeom prst="rect">
+            <a:avLst/>
+          </a:prstGeom>
+          <a:solidFill>
+            <a:srgbClr val="009CD6"/>
+          </a:solidFill>
+          <a:ln>
+            <a:noFill/>
+          </a:ln>
+          <a:effectLst/>
+        </p:spPr>
+        <p:style>
+          <a:lnRef idx="1">
+            <a:schemeClr val="accent1"/>
+          </a:lnRef>
+          <a:fillRef idx="3">
+            <a:schemeClr val="accent1"/>
+          </a:fillRef>
+          <a:effectRef idx="2">
+            <a:schemeClr val="accent1"/>
+          </a:effectRef>
+          <a:fontRef idx="minor">
+            <a:schemeClr val="lt1"/>
+          </a:fontRef>
+        </p:style>
+        <p:txBody>
+          <a:bodyPr rtlCol="0" anchor="ctr"/>
+          <a:lstStyle/>
+          <a:p>
+            <a:pPr algn="ctr"/>
+          </a:p>
+        </p:txBody>
+      </p:sp>
+      <p:sp>
+        <p:nvSpPr>
+          <p:cNvPr id="3" name="TextBox 2"/>
+          <p:cNvSpPr txBox="1"/>
+          <p:nvPr/>
+        </p:nvSpPr>
+        <p:spPr>
+          <a:xfrm>
+            <a:off x="621792" y="274320"/>
+            <a:ext cx="11247120" cy="914400"/>
+          </a:xfrm>
+          <a:prstGeom prst="rect">
+            <a:avLst/>
+          </a:prstGeom>
+          <a:noFill/>
+        </p:spPr>
+        <p:txBody>
+          <a:bodyPr wrap="square">
+            <a:spAutoFit/>
+          </a:bodyPr>
+          <a:lstStyle/>
+          <a:p>
+            <a:r>
+              <a:rPr sz="2800" b="1" i="0">
+                <a:solidFill>
+                  <a:srgbClr val="1A1A1A"/>
+                </a:solidFill>
+                <a:latin typeface="Arial"/>
+              </a:rPr>
+              <a:t>A light gate keeps the repository conformant as it grows</a:t>
+            </a:r>
+          </a:p>
+        </p:txBody>
+      </p:sp>
+      <p:sp>
+        <p:nvSpPr>
+          <p:cNvPr id="4" name="Oval 3"/>
+          <p:cNvSpPr/>
+          <p:nvPr/>
+        </p:nvSpPr>
+        <p:spPr>
+          <a:xfrm>
+            <a:off x="621792" y="1508760"/>
+            <a:ext cx="310896" cy="310896"/>
+          </a:xfrm>
+          <a:prstGeom prst="ellipse">
+            <a:avLst/>
+          </a:prstGeom>
+          <a:solidFill>
+            <a:srgbClr val="009CD6"/>
+          </a:solidFill>
+          <a:ln>
+            <a:noFill/>
+          </a:ln>
+          <a:effectLst/>
+        </p:spPr>
+        <p:style>
+          <a:lnRef idx="1">
+            <a:schemeClr val="accent1"/>
+          </a:lnRef>
+          <a:fillRef idx="3">
+            <a:schemeClr val="accent1"/>
+          </a:fillRef>
+          <a:effectRef idx="2">
+            <a:schemeClr val="accent1"/>
+          </a:effectRef>
+          <a:fontRef idx="minor">
+            <a:schemeClr val="lt1"/>
+          </a:fontRef>
+        </p:style>
+        <p:txBody>
+          <a:bodyPr rtlCol="0" anchor="ctr" lIns="0" rIns="0" tIns="0" bIns="0" wrap="square"/>
+          <a:lstStyle/>
+          <a:p>
+            <a:pPr algn="ctr"/>
+            <a:r>
+              <a:rPr sz="1300" b="1" i="0">
+                <a:solidFill>
+                  <a:srgbClr val="FFFFFF"/>
+                </a:solidFill>
+                <a:latin typeface="Arial"/>
+              </a:rPr>
+              <a:t>1</a:t>
+            </a:r>
+          </a:p>
+        </p:txBody>
+      </p:sp>
+      <p:sp>
+        <p:nvSpPr>
+          <p:cNvPr id="5" name="TextBox 4"/>
+          <p:cNvSpPr txBox="1"/>
+          <p:nvPr/>
+        </p:nvSpPr>
+        <p:spPr>
+          <a:xfrm>
+            <a:off x="1115568" y="1463040"/>
+            <a:ext cx="10527487" cy="1386839"/>
+          </a:xfrm>
+          <a:prstGeom prst="rect">
+            <a:avLst/>
+          </a:prstGeom>
+          <a:noFill/>
+        </p:spPr>
+        <p:txBody>
+          <a:bodyPr wrap="square">
+            <a:spAutoFit/>
+          </a:bodyPr>
+          <a:lstStyle/>
+          <a:p>
+            <a:pPr>
+              <a:spcAft>
+                <a:spcPts val="300"/>
+              </a:spcAft>
+            </a:pPr>
+            <a:r>
+              <a:rPr sz="1900" b="1" i="0">
+                <a:solidFill>
+                  <a:srgbClr val="1A1A1A"/>
+                </a:solidFill>
+                <a:latin typeface="Arial"/>
+              </a:rPr>
+              <a:t>Does the update use the shared entities correctly?</a:t>
+            </a:r>
+          </a:p>
+        </p:txBody>
+      </p:sp>
+      <p:sp>
+        <p:nvSpPr>
+          <p:cNvPr id="6" name="Rectangle 5"/>
+          <p:cNvSpPr/>
+          <p:nvPr/>
+        </p:nvSpPr>
+        <p:spPr>
+          <a:xfrm>
+            <a:off x="621792" y="2854452"/>
+            <a:ext cx="10881360" cy="12700"/>
+          </a:xfrm>
+          <a:prstGeom prst="rect">
+            <a:avLst/>
+          </a:prstGeom>
+          <a:solidFill>
+            <a:srgbClr val="DDECF4"/>
+          </a:solidFill>
+          <a:ln>
+            <a:noFill/>
+          </a:ln>
+          <a:effectLst/>
+        </p:spPr>
+        <p:style>
+          <a:lnRef idx="1">
+            <a:schemeClr val="accent1"/>
+          </a:lnRef>
+          <a:fillRef idx="3">
+            <a:schemeClr val="accent1"/>
+          </a:fillRef>
+          <a:effectRef idx="2">
+            <a:schemeClr val="accent1"/>
+          </a:effectRef>
+          <a:fontRef idx="minor">
+            <a:schemeClr val="lt1"/>
+          </a:fontRef>
+        </p:style>
+        <p:txBody>
+          <a:bodyPr rtlCol="0" anchor="ctr"/>
+          <a:lstStyle/>
+          <a:p>
+            <a:pPr algn="ctr"/>
+          </a:p>
+        </p:txBody>
+      </p:sp>
+      <p:sp>
+        <p:nvSpPr>
+          <p:cNvPr id="7" name="Oval 6"/>
+          <p:cNvSpPr/>
+          <p:nvPr/>
+        </p:nvSpPr>
+        <p:spPr>
+          <a:xfrm>
+            <a:off x="621792" y="2941319"/>
+            <a:ext cx="310896" cy="310896"/>
+          </a:xfrm>
+          <a:prstGeom prst="ellipse">
+            <a:avLst/>
+          </a:prstGeom>
+          <a:solidFill>
+            <a:srgbClr val="009CD6"/>
+          </a:solidFill>
+          <a:ln>
+            <a:noFill/>
+          </a:ln>
+          <a:effectLst/>
+        </p:spPr>
+        <p:style>
+          <a:lnRef idx="1">
+            <a:schemeClr val="accent1"/>
+          </a:lnRef>
+          <a:fillRef idx="3">
+            <a:schemeClr val="accent1"/>
+          </a:fillRef>
+          <a:effectRef idx="2">
+            <a:schemeClr val="accent1"/>
+          </a:effectRef>
+          <a:fontRef idx="minor">
+            <a:schemeClr val="lt1"/>
+          </a:fontRef>
+        </p:style>
+        <p:txBody>
+          <a:bodyPr rtlCol="0" anchor="ctr" lIns="0" rIns="0" tIns="0" bIns="0" wrap="square"/>
+          <a:lstStyle/>
+          <a:p>
+            <a:pPr algn="ctr"/>
+            <a:r>
+              <a:rPr sz="1300" b="1" i="0">
+                <a:solidFill>
+                  <a:srgbClr val="FFFFFF"/>
+                </a:solidFill>
+                <a:latin typeface="Arial"/>
+              </a:rPr>
+              <a:t>2</a:t>
+            </a:r>
+          </a:p>
+        </p:txBody>
+      </p:sp>
+      <p:sp>
+        <p:nvSpPr>
+          <p:cNvPr id="8" name="TextBox 7"/>
+          <p:cNvSpPr txBox="1"/>
+          <p:nvPr/>
+        </p:nvSpPr>
+        <p:spPr>
+          <a:xfrm>
+            <a:off x="1115568" y="2895600"/>
+            <a:ext cx="10527487" cy="1386839"/>
+          </a:xfrm>
+          <a:prstGeom prst="rect">
+            <a:avLst/>
+          </a:prstGeom>
+          <a:noFill/>
+        </p:spPr>
+        <p:txBody>
+          <a:bodyPr wrap="square">
+            <a:spAutoFit/>
+          </a:bodyPr>
+          <a:lstStyle/>
+          <a:p>
+            <a:pPr>
+              <a:spcAft>
+                <a:spcPts val="300"/>
+              </a:spcAft>
+            </a:pPr>
+            <a:r>
+              <a:rPr sz="1900" b="1" i="0">
+                <a:solidFill>
+                  <a:srgbClr val="1A1A1A"/>
+                </a:solidFill>
+                <a:latin typeface="Arial"/>
+              </a:rPr>
+              <a:t>Does every data domain still have exactly one owner?</a:t>
+            </a:r>
+          </a:p>
+        </p:txBody>
+      </p:sp>
+      <p:sp>
+        <p:nvSpPr>
+          <p:cNvPr id="9" name="Rectangle 8"/>
+          <p:cNvSpPr/>
+          <p:nvPr/>
+        </p:nvSpPr>
+        <p:spPr>
+          <a:xfrm>
+            <a:off x="621792" y="4287011"/>
+            <a:ext cx="10881360" cy="12700"/>
+          </a:xfrm>
+          <a:prstGeom prst="rect">
+            <a:avLst/>
+          </a:prstGeom>
+          <a:solidFill>
+            <a:srgbClr val="DDECF4"/>
+          </a:solidFill>
+          <a:ln>
+            <a:noFill/>
+          </a:ln>
+          <a:effectLst/>
+        </p:spPr>
+        <p:style>
+          <a:lnRef idx="1">
+            <a:schemeClr val="accent1"/>
+          </a:lnRef>
+          <a:fillRef idx="3">
+            <a:schemeClr val="accent1"/>
+          </a:fillRef>
+          <a:effectRef idx="2">
+            <a:schemeClr val="accent1"/>
+          </a:effectRef>
+          <a:fontRef idx="minor">
+            <a:schemeClr val="lt1"/>
+          </a:fontRef>
+        </p:style>
+        <p:txBody>
+          <a:bodyPr rtlCol="0" anchor="ctr"/>
+          <a:lstStyle/>
+          <a:p>
+            <a:pPr algn="ctr"/>
+          </a:p>
+        </p:txBody>
+      </p:sp>
+      <p:sp>
+        <p:nvSpPr>
+          <p:cNvPr id="10" name="Oval 9"/>
+          <p:cNvSpPr/>
+          <p:nvPr/>
+        </p:nvSpPr>
+        <p:spPr>
+          <a:xfrm>
+            <a:off x="621792" y="4373879"/>
+            <a:ext cx="310896" cy="310896"/>
+          </a:xfrm>
+          <a:prstGeom prst="ellipse">
+            <a:avLst/>
+          </a:prstGeom>
+          <a:solidFill>
+            <a:srgbClr val="009CD6"/>
+          </a:solidFill>
+          <a:ln>
+            <a:noFill/>
+          </a:ln>
+          <a:effectLst/>
+        </p:spPr>
+        <p:style>
+          <a:lnRef idx="1">
+            <a:schemeClr val="accent1"/>
+          </a:lnRef>
+          <a:fillRef idx="3">
+            <a:schemeClr val="accent1"/>
+          </a:fillRef>
+          <a:effectRef idx="2">
+            <a:schemeClr val="accent1"/>
+          </a:effectRef>
+          <a:fontRef idx="minor">
+            <a:schemeClr val="lt1"/>
+          </a:fontRef>
+        </p:style>
+        <p:txBody>
+          <a:bodyPr rtlCol="0" anchor="ctr" lIns="0" rIns="0" tIns="0" bIns="0" wrap="square"/>
+          <a:lstStyle/>
+          <a:p>
+            <a:pPr algn="ctr"/>
+            <a:r>
+              <a:rPr sz="1300" b="1" i="0">
+                <a:solidFill>
+                  <a:srgbClr val="FFFFFF"/>
+                </a:solidFill>
+                <a:latin typeface="Arial"/>
+              </a:rPr>
+              <a:t>3</a:t>
+            </a:r>
+          </a:p>
+        </p:txBody>
+      </p:sp>
+      <p:sp>
+        <p:nvSpPr>
+          <p:cNvPr id="11" name="TextBox 10"/>
+          <p:cNvSpPr txBox="1"/>
+          <p:nvPr/>
+        </p:nvSpPr>
+        <p:spPr>
+          <a:xfrm>
+            <a:off x="1115568" y="4328159"/>
+            <a:ext cx="10527487" cy="1386839"/>
+          </a:xfrm>
+          <a:prstGeom prst="rect">
+            <a:avLst/>
+          </a:prstGeom>
+          <a:noFill/>
+        </p:spPr>
+        <p:txBody>
+          <a:bodyPr wrap="square">
+            <a:spAutoFit/>
+          </a:bodyPr>
+          <a:lstStyle/>
+          <a:p>
+            <a:pPr>
+              <a:spcAft>
+                <a:spcPts val="300"/>
+              </a:spcAft>
+            </a:pPr>
+            <a:r>
+              <a:rPr sz="1900" b="1" i="0">
+                <a:solidFill>
+                  <a:srgbClr val="1A1A1A"/>
+                </a:solidFill>
+                <a:latin typeface="Arial"/>
+              </a:rPr>
+              <a:t>Is every decision logged with its reason?</a:t>
+            </a:r>
+          </a:p>
+        </p:txBody>
+      </p:sp>
+      <p:sp>
+        <p:nvSpPr>
+          <p:cNvPr id="12" name="TextBox 11"/>
+          <p:cNvSpPr txBox="1"/>
+          <p:nvPr/>
+        </p:nvSpPr>
+        <p:spPr>
+          <a:xfrm>
+            <a:off x="658368" y="5870448"/>
+            <a:ext cx="10881360" cy="548640"/>
+          </a:xfrm>
+          <a:prstGeom prst="rect">
+            <a:avLst/>
+          </a:prstGeom>
+          <a:noFill/>
+        </p:spPr>
+        <p:txBody>
+          <a:bodyPr wrap="square">
+            <a:spAutoFit/>
+          </a:bodyPr>
+          <a:lstStyle/>
+          <a:p>
+            <a:r>
+              <a:rPr sz="1550" b="1" i="0">
+                <a:solidFill>
+                  <a:srgbClr val="006E96"/>
+                </a:solidFill>
+                <a:latin typeface="Arial"/>
+              </a:rPr>
+              <a:t>The check is small. Skipping it fills the repository with orphans and private language.</a:t>
+            </a:r>
+          </a:p>
+        </p:txBody>
+      </p:sp>
+      <p:sp>
+        <p:nvSpPr>
+          <p:cNvPr id="13" name="TextBox 12"/>
+          <p:cNvSpPr txBox="1"/>
+          <p:nvPr/>
+        </p:nvSpPr>
+        <p:spPr>
+          <a:xfrm>
+            <a:off x="457200" y="6473952"/>
+            <a:ext cx="7772400" cy="292608"/>
+          </a:xfrm>
+          <a:prstGeom prst="rect">
+            <a:avLst/>
+          </a:prstGeom>
+          <a:noFill/>
+        </p:spPr>
+        <p:txBody>
+          <a:bodyPr wrap="square">
+            <a:spAutoFit/>
+          </a:bodyPr>
+          <a:lstStyle/>
+          <a:p>
+            <a:r>
+              <a:rPr sz="900" b="0" i="0">
+                <a:solidFill>
+                  <a:srgbClr val="595959"/>
+                </a:solidFill>
+                <a:latin typeface="Arial"/>
+              </a:rPr>
+              <a:t>3.3 · Keep the repository true — the update discipline</a:t>
+            </a:r>
+          </a:p>
+        </p:txBody>
+      </p:sp>
+    </p:spTree>
+  </p:cSld>
+  <p:clrMapOvr>
+    <a:masterClrMapping/>
+  </p:clrMapOvr>
+</p:sld>
+</file>
+
+<file path=ppt/slides/slide26.xml><?xml version="1.0" encoding="utf-8"?>
+<p:sld xmlns:a="http://schemas.openxmlformats.org/drawingml/2006/main" xmlns:p="http://schemas.openxmlformats.org/presentationml/2006/main" xmlns:r="http://schemas.openxmlformats.org/officeDocument/2006/relationships">
+  <p:cSld>
+    <p:spTree>
+      <p:nvGrpSpPr>
+        <p:cNvPr id="1" name=""/>
+        <p:cNvGrpSpPr/>
+        <p:nvPr/>
+      </p:nvGrpSpPr>
+      <p:grpSpPr/>
+      <p:sp>
+        <p:nvSpPr>
+          <p:cNvPr id="2" name="Rectangle 1"/>
+          <p:cNvSpPr/>
+          <p:nvPr/>
+        </p:nvSpPr>
+        <p:spPr>
+          <a:xfrm>
+            <a:off x="457200" y="384048"/>
+            <a:ext cx="45720" cy="256032"/>
+          </a:xfrm>
+          <a:prstGeom prst="rect">
+            <a:avLst/>
+          </a:prstGeom>
+          <a:solidFill>
+            <a:srgbClr val="009CD6"/>
+          </a:solidFill>
+          <a:ln>
+            <a:noFill/>
+          </a:ln>
+          <a:effectLst/>
+        </p:spPr>
+        <p:style>
+          <a:lnRef idx="1">
+            <a:schemeClr val="accent1"/>
+          </a:lnRef>
+          <a:fillRef idx="3">
+            <a:schemeClr val="accent1"/>
+          </a:fillRef>
+          <a:effectRef idx="2">
+            <a:schemeClr val="accent1"/>
+          </a:effectRef>
+          <a:fontRef idx="minor">
+            <a:schemeClr val="lt1"/>
+          </a:fontRef>
+        </p:style>
+        <p:txBody>
+          <a:bodyPr rtlCol="0" anchor="ctr"/>
+          <a:lstStyle/>
+          <a:p>
+            <a:pPr algn="ctr"/>
+          </a:p>
+        </p:txBody>
+      </p:sp>
+      <p:sp>
+        <p:nvSpPr>
+          <p:cNvPr id="3" name="TextBox 2"/>
+          <p:cNvSpPr txBox="1"/>
+          <p:nvPr/>
+        </p:nvSpPr>
+        <p:spPr>
+          <a:xfrm>
+            <a:off x="621792" y="274320"/>
+            <a:ext cx="11247120" cy="914400"/>
+          </a:xfrm>
+          <a:prstGeom prst="rect">
+            <a:avLst/>
+          </a:prstGeom>
+          <a:noFill/>
+        </p:spPr>
+        <p:txBody>
+          <a:bodyPr wrap="square">
+            <a:spAutoFit/>
+          </a:bodyPr>
+          <a:lstStyle/>
+          <a:p>
+            <a:r>
+              <a:rPr sz="2800" b="1" i="0">
+                <a:solidFill>
+                  <a:srgbClr val="1A1A1A"/>
+                </a:solidFill>
+                <a:latin typeface="Arial"/>
+              </a:rPr>
+              <a:t>The cheapest moment to update the repository is when a project comes to the Board</a:t>
+            </a:r>
+          </a:p>
+        </p:txBody>
+      </p:sp>
+      <p:sp>
+        <p:nvSpPr>
+          <p:cNvPr id="4" name="TextBox 3"/>
+          <p:cNvSpPr txBox="1"/>
+          <p:nvPr/>
+        </p:nvSpPr>
+        <p:spPr>
+          <a:xfrm>
+            <a:off x="658368" y="1600200"/>
+            <a:ext cx="10881360" cy="2651760"/>
+          </a:xfrm>
+          <a:prstGeom prst="rect">
+            <a:avLst/>
+          </a:prstGeom>
+          <a:noFill/>
+        </p:spPr>
+        <p:txBody>
+          <a:bodyPr wrap="square">
+            <a:spAutoFit/>
+          </a:bodyPr>
+          <a:lstStyle/>
+          <a:p>
+            <a:pPr>
+              <a:spcAft>
+                <a:spcPts val="1200"/>
+              </a:spcAft>
+            </a:pPr>
+            <a:r>
+              <a:rPr sz="2000" b="0" i="0">
+                <a:solidFill>
+                  <a:srgbClr val="1A1A1A"/>
+                </a:solidFill>
+                <a:latin typeface="Arial"/>
+              </a:rPr>
+              <a:t>The project tells you what it will build, what it will consume, and what data it touches. That is exactly the information the repository needs.</a:t>
+            </a:r>
+          </a:p>
+          <a:p>
+            <a:pPr>
+              <a:spcAft>
+                <a:spcPts val="1200"/>
+              </a:spcAft>
+            </a:pPr>
+            <a:r>
+              <a:rPr sz="2000" b="0" i="0">
+                <a:solidFill>
+                  <a:srgbClr val="1A1A1A"/>
+                </a:solidFill>
+                <a:latin typeface="Arial"/>
+              </a:rPr>
+              <a:t>So tie the two together: a project that passes the gate leaves its architecture change in the repository as it goes.</a:t>
+            </a:r>
+          </a:p>
+        </p:txBody>
+      </p:sp>
+      <p:sp>
+        <p:nvSpPr>
+          <p:cNvPr id="5" name="Rounded Rectangle 4"/>
+          <p:cNvSpPr/>
+          <p:nvPr/>
+        </p:nvSpPr>
+        <p:spPr>
+          <a:xfrm>
+            <a:off x="658368" y="4434840"/>
+            <a:ext cx="10881360" cy="1325880"/>
+          </a:xfrm>
+          <a:prstGeom prst="roundRect">
+            <a:avLst>
+              <a:gd name="adj" fmla="val 4500"/>
+            </a:avLst>
+          </a:prstGeom>
+          <a:solidFill>
+            <a:srgbClr val="E5F5FB"/>
+          </a:solidFill>
+          <a:ln>
+            <a:noFill/>
+          </a:ln>
+          <a:effectLst/>
+        </p:spPr>
+        <p:style>
+          <a:lnRef idx="1">
+            <a:schemeClr val="accent1"/>
+          </a:lnRef>
+          <a:fillRef idx="3">
+            <a:schemeClr val="accent1"/>
+          </a:fillRef>
+          <a:effectRef idx="2">
+            <a:schemeClr val="accent1"/>
+          </a:effectRef>
+          <a:fontRef idx="minor">
+            <a:schemeClr val="lt1"/>
+          </a:fontRef>
+        </p:style>
+        <p:txBody>
+          <a:bodyPr rtlCol="0" anchor="ctr"/>
+          <a:lstStyle/>
+          <a:p>
+            <a:pPr algn="ctr"/>
+          </a:p>
+        </p:txBody>
+      </p:sp>
+      <p:sp>
+        <p:nvSpPr>
+          <p:cNvPr id="6" name="TextBox 5"/>
+          <p:cNvSpPr txBox="1"/>
+          <p:nvPr/>
+        </p:nvSpPr>
+        <p:spPr>
+          <a:xfrm>
+            <a:off x="859536" y="4626864"/>
+            <a:ext cx="10479024" cy="1051560"/>
+          </a:xfrm>
+          <a:prstGeom prst="rect">
+            <a:avLst/>
+          </a:prstGeom>
+          <a:noFill/>
+        </p:spPr>
+        <p:txBody>
+          <a:bodyPr wrap="square">
+            <a:spAutoFit/>
+          </a:bodyPr>
+          <a:lstStyle/>
+          <a:p>
+            <a:pPr>
+              <a:spcAft>
+                <a:spcPts val="700"/>
+              </a:spcAft>
+            </a:pPr>
+            <a:r>
+              <a:rPr sz="2300" b="1" i="0">
+                <a:solidFill>
+                  <a:srgbClr val="006E96"/>
+                </a:solidFill>
+                <a:latin typeface="Arial"/>
+              </a:rPr>
+              <a:t>The governance process and the update discipline are one motion, done once.</a:t>
+            </a:r>
+          </a:p>
+        </p:txBody>
+      </p:sp>
+      <p:sp>
+        <p:nvSpPr>
+          <p:cNvPr id="7" name="TextBox 6"/>
+          <p:cNvSpPr txBox="1"/>
+          <p:nvPr/>
+        </p:nvSpPr>
+        <p:spPr>
+          <a:xfrm>
+            <a:off x="457200" y="6473952"/>
+            <a:ext cx="7772400" cy="292608"/>
+          </a:xfrm>
+          <a:prstGeom prst="rect">
+            <a:avLst/>
+          </a:prstGeom>
+          <a:noFill/>
+        </p:spPr>
+        <p:txBody>
+          <a:bodyPr wrap="square">
+            <a:spAutoFit/>
+          </a:bodyPr>
+          <a:lstStyle/>
+          <a:p>
+            <a:r>
+              <a:rPr sz="900" b="0" i="0">
+                <a:solidFill>
+                  <a:srgbClr val="595959"/>
+                </a:solidFill>
+                <a:latin typeface="Arial"/>
+              </a:rPr>
+              <a:t>3.3 · Keep the repository true — the update discipline</a:t>
+            </a:r>
+          </a:p>
+        </p:txBody>
+      </p:sp>
+    </p:spTree>
+  </p:cSld>
+  <p:clrMapOvr>
+    <a:masterClrMapping/>
+  </p:clrMapOvr>
+</p:sld>
+</file>
+
+<file path=ppt/slides/slide27.xml><?xml version="1.0" encoding="utf-8"?>
+<p:sld xmlns:a="http://schemas.openxmlformats.org/drawingml/2006/main" xmlns:p="http://schemas.openxmlformats.org/presentationml/2006/main" xmlns:r="http://schemas.openxmlformats.org/officeDocument/2006/relationships">
+  <p:cSld>
+    <p:spTree>
+      <p:nvGrpSpPr>
+        <p:cNvPr id="1" name=""/>
+        <p:cNvGrpSpPr/>
+        <p:nvPr/>
+      </p:nvGrpSpPr>
+      <p:grpSpPr/>
+      <p:sp>
+        <p:nvSpPr>
           <p:cNvPr id="2" name="TextBox 1"/>
           <p:cNvSpPr txBox="1"/>
           <p:nvPr/>
@@ -14799,7 +14368,7 @@
 </p:sld>
 </file>
 
-<file path=ppt/slides/slide25.xml><?xml version="1.0" encoding="utf-8"?>
+<file path=ppt/slides/slide28.xml><?xml version="1.0" encoding="utf-8"?>
 <p:sld xmlns:a="http://schemas.openxmlformats.org/drawingml/2006/main" xmlns:p="http://schemas.openxmlformats.org/presentationml/2006/main" xmlns:r="http://schemas.openxmlformats.org/officeDocument/2006/relationships">
   <p:cSld>
     <p:spTree>

--- a/10-Knowledge-Products/KP1-GEA/videos/module_3/en/decks/KP1_M3_3.3_Deck_v0.2.pptx
+++ b/10-Knowledge-Products/KP1-GEA/videos/module_3/en/decks/KP1_M3_3.3_Deck_v0.2.pptx
@@ -11836,7 +11836,7 @@
                 </a:solidFill>
                 <a:latin typeface="Arial"/>
               </a:rPr>
-              <a:t>~4 minutes · standalone video · voice-over on text slides</a:t>
+              <a:t>standalone video · voice-over on text slides</a:t>
             </a:r>
           </a:p>
         </p:txBody>

--- a/10-Knowledge-Products/KP1-GEA/videos/module_3/en/decks/KP1_M3_3.3_Deck_v0.2.pptx
+++ b/10-Knowledge-Products/KP1-GEA/videos/module_3/en/decks/KP1_M3_3.3_Deck_v0.2.pptx
@@ -11700,7 +11700,7 @@
                 </a:solidFill>
                 <a:latin typeface="Arial"/>
               </a:rPr>
-              <a:t>KP1 · MODULE 3 · VIDEO 3.3</a:t>
+              <a:t>MODULE 3 · VIDEO 3.3</a:t>
             </a:r>
           </a:p>
         </p:txBody>
